--- a/genz-entrepreneurship/Thanda-Godam-Pitch.pptx
+++ b/genz-entrepreneurship/Thanda-Godam-Pitch.pptx
@@ -1965,7 +1965,7 @@
           <a:p>
             <a:r>
               <a:rPr lang="en-US" dirty="0"/>
-              <a:t>Keep the distinction between user, payer and beneficiary clear, because it is the thing panels probe. The grower is both user and payer for storage. The city buyer is the payer for aggregation. Be upfront that the 300 to 400 household figure is our own estimate and not a published number.</a:t>
+              <a:t>Keep the distinction between user, payer and beneficiary clear, because it is the thing panels probe. The grower is both user and payer for storage. The city buyer is the payer for aggregation. Be upfront that the 300 to 400 household figure is our own estimate and not a published number. If asked why Okara: Okara, Depalpur, Kasur, Sahiwal and Pakpattan carry about 75 percent of Punjab's potato crop, so the district already has cold storage, all of it sized and contracted for potato traders. The vegetable growers farming next to it get nothing from it. That contrast is the reason we chose the site, and it is also why we lead with tomato, chili and leafy greens rather than potato.</a:t>
             </a:r>
             <a:endParaRPr lang="en-US" dirty="0"/>
           </a:p>
@@ -5616,8 +5616,8 @@
         </p:nvSpPr>
         <p:spPr>
           <a:xfrm>
-            <a:off x="640080" y="1810512"/>
-            <a:ext cx="10881360" cy="676656"/>
+            <a:off x="640080" y="1773936"/>
+            <a:ext cx="10881360" cy="630936"/>
           </a:xfrm>
           <a:prstGeom prst="rect">
             <a:avLst/>
@@ -5636,7 +5636,7 @@
         </p:nvSpPr>
         <p:spPr>
           <a:xfrm>
-            <a:off x="822960" y="1956816"/>
+            <a:off x="822960" y="1929384"/>
             <a:ext cx="329184" cy="329184"/>
           </a:xfrm>
           <a:prstGeom prst="ellipse">
@@ -5656,7 +5656,7 @@
         </p:nvSpPr>
         <p:spPr>
           <a:xfrm>
-            <a:off x="822960" y="1956816"/>
+            <a:off x="822960" y="1929384"/>
             <a:ext cx="329184" cy="329184"/>
           </a:xfrm>
           <a:prstGeom prst="rect">
@@ -5695,8 +5695,8 @@
         </p:nvSpPr>
         <p:spPr>
           <a:xfrm>
-            <a:off x="1280160" y="1874520"/>
-            <a:ext cx="3566160" cy="530352"/>
+            <a:off x="1280160" y="1828800"/>
+            <a:ext cx="3566160" cy="548640"/>
           </a:xfrm>
           <a:prstGeom prst="rect">
             <a:avLst/>
@@ -5710,12 +5710,12 @@
           <a:p>
             <a:pPr indent="0" marL="0">
               <a:lnSpc>
-                <a:spcPts val="1600"/>
+                <a:spcPts val="1500"/>
               </a:lnSpc>
               <a:buNone/>
             </a:pPr>
             <a:r>
-              <a:rPr lang="en-US" sz="1300" b="1" dirty="0">
+              <a:rPr lang="en-US" sz="1250" b="1" dirty="0">
                 <a:solidFill>
                   <a:srgbClr val="1A1A1A"/>
                 </a:solidFill>
@@ -5725,7 +5725,7 @@
               </a:rPr>
               <a:t>Growers do not trust us with their crop</a:t>
             </a:r>
-            <a:endParaRPr lang="en-US" sz="1300" dirty="0"/>
+            <a:endParaRPr lang="en-US" sz="1250" dirty="0"/>
           </a:p>
         </p:txBody>
       </p:sp>
@@ -5737,8 +5737,8 @@
         </p:nvSpPr>
         <p:spPr>
           <a:xfrm>
-            <a:off x="5029200" y="1874520"/>
-            <a:ext cx="6492240" cy="530352"/>
+            <a:off x="5029200" y="1828800"/>
+            <a:ext cx="6492240" cy="548640"/>
           </a:xfrm>
           <a:prstGeom prst="rect">
             <a:avLst/>
@@ -5752,12 +5752,12 @@
           <a:p>
             <a:pPr indent="0" marL="0">
               <a:lnSpc>
-                <a:spcPts val="1400"/>
+                <a:spcPts val="1350"/>
               </a:lnSpc>
               <a:buNone/>
             </a:pPr>
             <a:r>
-              <a:rPr lang="en-US" sz="1150" dirty="0">
+              <a:rPr lang="en-US" sz="1100" dirty="0">
                 <a:solidFill>
                   <a:srgbClr val="5F6B63"/>
                 </a:solidFill>
@@ -5767,7 +5767,7 @@
               </a:rPr>
               <a:t>Weigh, tag and photograph at the gate. Printed receipt every time. A village committee with two growers on it holds the second key.</a:t>
             </a:r>
-            <a:endParaRPr lang="en-US" sz="1150" dirty="0"/>
+            <a:endParaRPr lang="en-US" sz="1100" dirty="0"/>
           </a:p>
         </p:txBody>
       </p:sp>
@@ -5779,7 +5779,170 @@
         </p:nvSpPr>
         <p:spPr>
           <a:xfrm>
-            <a:off x="822960" y="2679192"/>
+            <a:off x="822960" y="2596896"/>
+            <a:ext cx="329184" cy="329184"/>
+          </a:xfrm>
+          <a:prstGeom prst="ellipse">
+            <a:avLst/>
+          </a:prstGeom>
+          <a:solidFill>
+            <a:srgbClr val="2E7D5B"/>
+          </a:solidFill>
+          <a:ln/>
+        </p:spPr>
+      </p:sp>
+      <p:sp>
+        <p:nvSpPr>
+          <p:cNvPr id="10" name="Text 8"/>
+          <p:cNvSpPr/>
+          <p:nvPr/>
+        </p:nvSpPr>
+        <p:spPr>
+          <a:xfrm>
+            <a:off x="822960" y="2596896"/>
+            <a:ext cx="329184" cy="329184"/>
+          </a:xfrm>
+          <a:prstGeom prst="rect">
+            <a:avLst/>
+          </a:prstGeom>
+          <a:noFill/>
+          <a:ln/>
+        </p:spPr>
+        <p:txBody>
+          <a:bodyPr wrap="square" lIns="0" tIns="0" rIns="0" bIns="0" rtlCol="0" anchor="ctr"/>
+          <a:lstStyle/>
+          <a:p>
+            <a:pPr algn="ctr" indent="0" marL="0">
+              <a:buNone/>
+            </a:pPr>
+            <a:r>
+              <a:rPr lang="en-US" sz="1350" b="1" dirty="0">
+                <a:solidFill>
+                  <a:srgbClr val="FFFFFF"/>
+                </a:solidFill>
+                <a:latin typeface="Calibri" pitchFamily="34" charset="0"/>
+                <a:ea typeface="Calibri" pitchFamily="34" charset="-122"/>
+                <a:cs typeface="Calibri" pitchFamily="34" charset="-120"/>
+              </a:rPr>
+              <a:t>2</a:t>
+            </a:r>
+            <a:endParaRPr lang="en-US" sz="1350" dirty="0"/>
+          </a:p>
+        </p:txBody>
+      </p:sp>
+      <p:sp>
+        <p:nvSpPr>
+          <p:cNvPr id="11" name="Text 9"/>
+          <p:cNvSpPr/>
+          <p:nvPr/>
+        </p:nvSpPr>
+        <p:spPr>
+          <a:xfrm>
+            <a:off x="1280160" y="2496312"/>
+            <a:ext cx="3566160" cy="548640"/>
+          </a:xfrm>
+          <a:prstGeom prst="rect">
+            <a:avLst/>
+          </a:prstGeom>
+          <a:noFill/>
+          <a:ln/>
+        </p:spPr>
+        <p:txBody>
+          <a:bodyPr wrap="square" lIns="0" tIns="0" rIns="0" bIns="0" rtlCol="0" anchor="ctr"/>
+          <a:lstStyle/>
+          <a:p>
+            <a:pPr indent="0" marL="0">
+              <a:lnSpc>
+                <a:spcPts val="1500"/>
+              </a:lnSpc>
+              <a:buNone/>
+            </a:pPr>
+            <a:r>
+              <a:rPr lang="en-US" sz="1250" b="1" dirty="0">
+                <a:solidFill>
+                  <a:srgbClr val="1A1A1A"/>
+                </a:solidFill>
+                <a:latin typeface="Cambria" pitchFamily="34" charset="0"/>
+                <a:ea typeface="Cambria" pitchFamily="34" charset="-122"/>
+                <a:cs typeface="Cambria" pitchFamily="34" charset="-120"/>
+              </a:rPr>
+              <a:t>Arguments over quality on collection</a:t>
+            </a:r>
+            <a:endParaRPr lang="en-US" sz="1250" dirty="0"/>
+          </a:p>
+        </p:txBody>
+      </p:sp>
+      <p:sp>
+        <p:nvSpPr>
+          <p:cNvPr id="12" name="Text 10"/>
+          <p:cNvSpPr/>
+          <p:nvPr/>
+        </p:nvSpPr>
+        <p:spPr>
+          <a:xfrm>
+            <a:off x="5029200" y="2496312"/>
+            <a:ext cx="6492240" cy="548640"/>
+          </a:xfrm>
+          <a:prstGeom prst="rect">
+            <a:avLst/>
+          </a:prstGeom>
+          <a:noFill/>
+          <a:ln/>
+        </p:spPr>
+        <p:txBody>
+          <a:bodyPr wrap="square" lIns="0" tIns="0" rIns="0" bIns="0" rtlCol="0" anchor="ctr"/>
+          <a:lstStyle/>
+          <a:p>
+            <a:pPr indent="0" marL="0">
+              <a:lnSpc>
+                <a:spcPts val="1350"/>
+              </a:lnSpc>
+              <a:buNone/>
+            </a:pPr>
+            <a:r>
+              <a:rPr lang="en-US" sz="1100" dirty="0">
+                <a:solidFill>
+                  <a:srgbClr val="5F6B63"/>
+                </a:solidFill>
+                <a:latin typeface="Calibri" pitchFamily="34" charset="0"/>
+                <a:ea typeface="Calibri" pitchFamily="34" charset="-122"/>
+                <a:cs typeface="Calibri" pitchFamily="34" charset="-120"/>
+              </a:rPr>
+              <a:t>The grade is agreed and written on the receipt when the crop goes in, with the entry photograph attached to it.</a:t>
+            </a:r>
+            <a:endParaRPr lang="en-US" sz="1100" dirty="0"/>
+          </a:p>
+        </p:txBody>
+      </p:sp>
+      <p:sp>
+        <p:nvSpPr>
+          <p:cNvPr id="13" name="Shape 11"/>
+          <p:cNvSpPr/>
+          <p:nvPr/>
+        </p:nvSpPr>
+        <p:spPr>
+          <a:xfrm>
+            <a:off x="640080" y="3108960"/>
+            <a:ext cx="10881360" cy="630936"/>
+          </a:xfrm>
+          <a:prstGeom prst="rect">
+            <a:avLst/>
+          </a:prstGeom>
+          <a:solidFill>
+            <a:srgbClr val="F2F5F1"/>
+          </a:solidFill>
+          <a:ln/>
+        </p:spPr>
+      </p:sp>
+      <p:sp>
+        <p:nvSpPr>
+          <p:cNvPr id="14" name="Shape 12"/>
+          <p:cNvSpPr/>
+          <p:nvPr/>
+        </p:nvSpPr>
+        <p:spPr>
+          <a:xfrm>
+            <a:off x="822960" y="3264408"/>
             <a:ext cx="329184" cy="329184"/>
           </a:xfrm>
           <a:prstGeom prst="ellipse">
@@ -5793,13 +5956,13 @@
       </p:sp>
       <p:sp>
         <p:nvSpPr>
-          <p:cNvPr id="10" name="Text 8"/>
-          <p:cNvSpPr/>
-          <p:nvPr/>
-        </p:nvSpPr>
-        <p:spPr>
-          <a:xfrm>
-            <a:off x="822960" y="2679192"/>
+          <p:cNvPr id="15" name="Text 13"/>
+          <p:cNvSpPr/>
+          <p:nvPr/>
+        </p:nvSpPr>
+        <p:spPr>
+          <a:xfrm>
+            <a:off x="822960" y="3264408"/>
             <a:ext cx="329184" cy="329184"/>
           </a:xfrm>
           <a:prstGeom prst="rect">
@@ -5824,7 +5987,7 @@
                 <a:ea typeface="Calibri" pitchFamily="34" charset="-122"/>
                 <a:cs typeface="Calibri" pitchFamily="34" charset="-120"/>
               </a:rPr>
-              <a:t>2</a:t>
+              <a:t>3</a:t>
             </a:r>
             <a:endParaRPr lang="en-US" sz="1350" dirty="0"/>
           </a:p>
@@ -5832,14 +5995,14 @@
       </p:sp>
       <p:sp>
         <p:nvSpPr>
-          <p:cNvPr id="11" name="Text 9"/>
-          <p:cNvSpPr/>
-          <p:nvPr/>
-        </p:nvSpPr>
-        <p:spPr>
-          <a:xfrm>
-            <a:off x="1280160" y="2596896"/>
-            <a:ext cx="3566160" cy="530352"/>
+          <p:cNvPr id="16" name="Text 14"/>
+          <p:cNvSpPr/>
+          <p:nvPr/>
+        </p:nvSpPr>
+        <p:spPr>
+          <a:xfrm>
+            <a:off x="1280160" y="3163824"/>
+            <a:ext cx="3566160" cy="548640"/>
           </a:xfrm>
           <a:prstGeom prst="rect">
             <a:avLst/>
@@ -5853,12 +6016,12 @@
           <a:p>
             <a:pPr indent="0" marL="0">
               <a:lnSpc>
-                <a:spcPts val="1600"/>
+                <a:spcPts val="1500"/>
               </a:lnSpc>
               <a:buNone/>
             </a:pPr>
             <a:r>
-              <a:rPr lang="en-US" sz="1300" b="1" dirty="0">
+              <a:rPr lang="en-US" sz="1250" b="1" dirty="0">
                 <a:solidFill>
                   <a:srgbClr val="1A1A1A"/>
                 </a:solidFill>
@@ -5866,22 +6029,22 @@
                 <a:ea typeface="Cambria" pitchFamily="34" charset="-122"/>
                 <a:cs typeface="Cambria" pitchFamily="34" charset="-120"/>
               </a:rPr>
-              <a:t>Arguments over quality on collection</a:t>
-            </a:r>
-            <a:endParaRPr lang="en-US" sz="1300" dirty="0"/>
-          </a:p>
-        </p:txBody>
-      </p:sp>
-      <p:sp>
-        <p:nvSpPr>
-          <p:cNvPr id="12" name="Text 10"/>
-          <p:cNvSpPr/>
-          <p:nvPr/>
-        </p:nvSpPr>
-        <p:spPr>
-          <a:xfrm>
-            <a:off x="5029200" y="2596896"/>
-            <a:ext cx="6492240" cy="530352"/>
+              <a:t>The whole market crashes, not just one day's price</a:t>
+            </a:r>
+            <a:endParaRPr lang="en-US" sz="1250" dirty="0"/>
+          </a:p>
+        </p:txBody>
+      </p:sp>
+      <p:sp>
+        <p:nvSpPr>
+          <p:cNvPr id="17" name="Text 15"/>
+          <p:cNvSpPr/>
+          <p:nvPr/>
+        </p:nvSpPr>
+        <p:spPr>
+          <a:xfrm>
+            <a:off x="5029200" y="3163824"/>
+            <a:ext cx="6492240" cy="548640"/>
           </a:xfrm>
           <a:prstGeom prst="rect">
             <a:avLst/>
@@ -5895,12 +6058,12 @@
           <a:p>
             <a:pPr indent="0" marL="0">
               <a:lnSpc>
-                <a:spcPts val="1400"/>
+                <a:spcPts val="1350"/>
               </a:lnSpc>
               <a:buNone/>
             </a:pPr>
             <a:r>
-              <a:rPr lang="en-US" sz="1150" dirty="0">
+              <a:rPr lang="en-US" sz="1100" dirty="0">
                 <a:solidFill>
                   <a:srgbClr val="5F6B63"/>
                 </a:solidFill>
@@ -5908,22 +6071,165 @@
                 <a:ea typeface="Calibri" pitchFamily="34" charset="-122"/>
                 <a:cs typeface="Calibri" pitchFamily="34" charset="-120"/>
               </a:rPr>
-              <a:t>The grade is agreed and written on the receipt when the crop goes in, with the entry photograph attached to it.</a:t>
-            </a:r>
-            <a:endParaRPr lang="en-US" sz="1150" dirty="0"/>
-          </a:p>
-        </p:txBody>
-      </p:sp>
-      <p:sp>
-        <p:nvSpPr>
-          <p:cNvPr id="13" name="Shape 11"/>
-          <p:cNvSpPr/>
-          <p:nvPr/>
-        </p:nvSpPr>
-        <p:spPr>
-          <a:xfrm>
-            <a:off x="640080" y="3255264"/>
-            <a:ext cx="10881360" cy="676656"/>
+              <a:t>Storage buys days, it does not buy a different market. We lead with tomato, chili and leafy greens, where prices move week to week.</a:t>
+            </a:r>
+            <a:endParaRPr lang="en-US" sz="1100" dirty="0"/>
+          </a:p>
+        </p:txBody>
+      </p:sp>
+      <p:sp>
+        <p:nvSpPr>
+          <p:cNvPr id="18" name="Shape 16"/>
+          <p:cNvSpPr/>
+          <p:nvPr/>
+        </p:nvSpPr>
+        <p:spPr>
+          <a:xfrm>
+            <a:off x="822960" y="3931920"/>
+            <a:ext cx="329184" cy="329184"/>
+          </a:xfrm>
+          <a:prstGeom prst="ellipse">
+            <a:avLst/>
+          </a:prstGeom>
+          <a:solidFill>
+            <a:srgbClr val="2E7D5B"/>
+          </a:solidFill>
+          <a:ln/>
+        </p:spPr>
+      </p:sp>
+      <p:sp>
+        <p:nvSpPr>
+          <p:cNvPr id="19" name="Text 17"/>
+          <p:cNvSpPr/>
+          <p:nvPr/>
+        </p:nvSpPr>
+        <p:spPr>
+          <a:xfrm>
+            <a:off x="822960" y="3931920"/>
+            <a:ext cx="329184" cy="329184"/>
+          </a:xfrm>
+          <a:prstGeom prst="rect">
+            <a:avLst/>
+          </a:prstGeom>
+          <a:noFill/>
+          <a:ln/>
+        </p:spPr>
+        <p:txBody>
+          <a:bodyPr wrap="square" lIns="0" tIns="0" rIns="0" bIns="0" rtlCol="0" anchor="ctr"/>
+          <a:lstStyle/>
+          <a:p>
+            <a:pPr algn="ctr" indent="0" marL="0">
+              <a:buNone/>
+            </a:pPr>
+            <a:r>
+              <a:rPr lang="en-US" sz="1350" b="1" dirty="0">
+                <a:solidFill>
+                  <a:srgbClr val="FFFFFF"/>
+                </a:solidFill>
+                <a:latin typeface="Calibri" pitchFamily="34" charset="0"/>
+                <a:ea typeface="Calibri" pitchFamily="34" charset="-122"/>
+                <a:cs typeface="Calibri" pitchFamily="34" charset="-120"/>
+              </a:rPr>
+              <a:t>4</a:t>
+            </a:r>
+            <a:endParaRPr lang="en-US" sz="1350" dirty="0"/>
+          </a:p>
+        </p:txBody>
+      </p:sp>
+      <p:sp>
+        <p:nvSpPr>
+          <p:cNvPr id="20" name="Text 18"/>
+          <p:cNvSpPr/>
+          <p:nvPr/>
+        </p:nvSpPr>
+        <p:spPr>
+          <a:xfrm>
+            <a:off x="1280160" y="3831336"/>
+            <a:ext cx="3566160" cy="548640"/>
+          </a:xfrm>
+          <a:prstGeom prst="rect">
+            <a:avLst/>
+          </a:prstGeom>
+          <a:noFill/>
+          <a:ln/>
+        </p:spPr>
+        <p:txBody>
+          <a:bodyPr wrap="square" lIns="0" tIns="0" rIns="0" bIns="0" rtlCol="0" anchor="ctr"/>
+          <a:lstStyle/>
+          <a:p>
+            <a:pPr indent="0" marL="0">
+              <a:lnSpc>
+                <a:spcPts val="1500"/>
+              </a:lnSpc>
+              <a:buNone/>
+            </a:pPr>
+            <a:r>
+              <a:rPr lang="en-US" sz="1250" b="1" dirty="0">
+                <a:solidFill>
+                  <a:srgbClr val="1A1A1A"/>
+                </a:solidFill>
+                <a:latin typeface="Cambria" pitchFamily="34" charset="0"/>
+                <a:ea typeface="Cambria" pitchFamily="34" charset="-122"/>
+                <a:cs typeface="Cambria" pitchFamily="34" charset="-120"/>
+              </a:rPr>
+              <a:t>The room sits empty out of season</a:t>
+            </a:r>
+            <a:endParaRPr lang="en-US" sz="1250" dirty="0"/>
+          </a:p>
+        </p:txBody>
+      </p:sp>
+      <p:sp>
+        <p:nvSpPr>
+          <p:cNvPr id="21" name="Text 19"/>
+          <p:cNvSpPr/>
+          <p:nvPr/>
+        </p:nvSpPr>
+        <p:spPr>
+          <a:xfrm>
+            <a:off x="5029200" y="3831336"/>
+            <a:ext cx="6492240" cy="548640"/>
+          </a:xfrm>
+          <a:prstGeom prst="rect">
+            <a:avLst/>
+          </a:prstGeom>
+          <a:noFill/>
+          <a:ln/>
+        </p:spPr>
+        <p:txBody>
+          <a:bodyPr wrap="square" lIns="0" tIns="0" rIns="0" bIns="0" rtlCol="0" anchor="ctr"/>
+          <a:lstStyle/>
+          <a:p>
+            <a:pPr indent="0" marL="0">
+              <a:lnSpc>
+                <a:spcPts val="1350"/>
+              </a:lnSpc>
+              <a:buNone/>
+            </a:pPr>
+            <a:r>
+              <a:rPr lang="en-US" sz="1100" dirty="0">
+                <a:solidFill>
+                  <a:srgbClr val="5F6B63"/>
+                </a:solidFill>
+                <a:latin typeface="Calibri" pitchFamily="34" charset="0"/>
+                <a:ea typeface="Calibri" pitchFamily="34" charset="-122"/>
+                <a:cs typeface="Calibri" pitchFamily="34" charset="-120"/>
+              </a:rPr>
+              <a:t>Rotate to crops with different calendars, and offer the same room for seed, dairy and mango season overflow.</a:t>
+            </a:r>
+            <a:endParaRPr lang="en-US" sz="1100" dirty="0"/>
+          </a:p>
+        </p:txBody>
+      </p:sp>
+      <p:sp>
+        <p:nvSpPr>
+          <p:cNvPr id="22" name="Shape 20"/>
+          <p:cNvSpPr/>
+          <p:nvPr/>
+        </p:nvSpPr>
+        <p:spPr>
+          <a:xfrm>
+            <a:off x="640080" y="4443984"/>
+            <a:ext cx="10881360" cy="630936"/>
           </a:xfrm>
           <a:prstGeom prst="rect">
             <a:avLst/>
@@ -5936,13 +6242,13 @@
       </p:sp>
       <p:sp>
         <p:nvSpPr>
-          <p:cNvPr id="14" name="Shape 12"/>
-          <p:cNvSpPr/>
-          <p:nvPr/>
-        </p:nvSpPr>
-        <p:spPr>
-          <a:xfrm>
-            <a:off x="822960" y="3401568"/>
+          <p:cNvPr id="23" name="Shape 21"/>
+          <p:cNvSpPr/>
+          <p:nvPr/>
+        </p:nvSpPr>
+        <p:spPr>
+          <a:xfrm>
+            <a:off x="822960" y="4599432"/>
             <a:ext cx="329184" cy="329184"/>
           </a:xfrm>
           <a:prstGeom prst="ellipse">
@@ -5956,13 +6262,13 @@
       </p:sp>
       <p:sp>
         <p:nvSpPr>
-          <p:cNvPr id="15" name="Text 13"/>
-          <p:cNvSpPr/>
-          <p:nvPr/>
-        </p:nvSpPr>
-        <p:spPr>
-          <a:xfrm>
-            <a:off x="822960" y="3401568"/>
+          <p:cNvPr id="24" name="Text 22"/>
+          <p:cNvSpPr/>
+          <p:nvPr/>
+        </p:nvSpPr>
+        <p:spPr>
+          <a:xfrm>
+            <a:off x="822960" y="4599432"/>
             <a:ext cx="329184" cy="329184"/>
           </a:xfrm>
           <a:prstGeom prst="rect">
@@ -5987,7 +6293,7 @@
                 <a:ea typeface="Calibri" pitchFamily="34" charset="-122"/>
                 <a:cs typeface="Calibri" pitchFamily="34" charset="-120"/>
               </a:rPr>
-              <a:t>3</a:t>
+              <a:t>5</a:t>
             </a:r>
             <a:endParaRPr lang="en-US" sz="1350" dirty="0"/>
           </a:p>
@@ -5995,14 +6301,14 @@
       </p:sp>
       <p:sp>
         <p:nvSpPr>
-          <p:cNvPr id="16" name="Text 14"/>
-          <p:cNvSpPr/>
-          <p:nvPr/>
-        </p:nvSpPr>
-        <p:spPr>
-          <a:xfrm>
-            <a:off x="1280160" y="3319272"/>
-            <a:ext cx="3566160" cy="530352"/>
+          <p:cNvPr id="25" name="Text 23"/>
+          <p:cNvSpPr/>
+          <p:nvPr/>
+        </p:nvSpPr>
+        <p:spPr>
+          <a:xfrm>
+            <a:off x="1280160" y="4498848"/>
+            <a:ext cx="3566160" cy="548640"/>
           </a:xfrm>
           <a:prstGeom prst="rect">
             <a:avLst/>
@@ -6016,12 +6322,12 @@
           <a:p>
             <a:pPr indent="0" marL="0">
               <a:lnSpc>
-                <a:spcPts val="1600"/>
+                <a:spcPts val="1500"/>
               </a:lnSpc>
               <a:buNone/>
             </a:pPr>
             <a:r>
-              <a:rPr lang="en-US" sz="1300" b="1" dirty="0">
+              <a:rPr lang="en-US" sz="1250" b="1" dirty="0">
                 <a:solidFill>
                   <a:srgbClr val="1A1A1A"/>
                 </a:solidFill>
@@ -6029,22 +6335,22 @@
                 <a:ea typeface="Cambria" pitchFamily="34" charset="-122"/>
                 <a:cs typeface="Cambria" pitchFamily="34" charset="-120"/>
               </a:rPr>
-              <a:t>The room sits empty out of season</a:t>
-            </a:r>
-            <a:endParaRPr lang="en-US" sz="1300" dirty="0"/>
-          </a:p>
-        </p:txBody>
-      </p:sp>
-      <p:sp>
-        <p:nvSpPr>
-          <p:cNvPr id="17" name="Text 15"/>
-          <p:cNvSpPr/>
-          <p:nvPr/>
-        </p:nvSpPr>
-        <p:spPr>
-          <a:xfrm>
-            <a:off x="5029200" y="3319272"/>
-            <a:ext cx="6492240" cy="530352"/>
+              <a:t>Solar or compressor breakdown</a:t>
+            </a:r>
+            <a:endParaRPr lang="en-US" sz="1250" dirty="0"/>
+          </a:p>
+        </p:txBody>
+      </p:sp>
+      <p:sp>
+        <p:nvSpPr>
+          <p:cNvPr id="26" name="Text 24"/>
+          <p:cNvSpPr/>
+          <p:nvPr/>
+        </p:nvSpPr>
+        <p:spPr>
+          <a:xfrm>
+            <a:off x="5029200" y="4498848"/>
+            <a:ext cx="6492240" cy="548640"/>
           </a:xfrm>
           <a:prstGeom prst="rect">
             <a:avLst/>
@@ -6058,12 +6364,12 @@
           <a:p>
             <a:pPr indent="0" marL="0">
               <a:lnSpc>
-                <a:spcPts val="1400"/>
+                <a:spcPts val="1350"/>
               </a:lnSpc>
               <a:buNone/>
             </a:pPr>
             <a:r>
-              <a:rPr lang="en-US" sz="1150" dirty="0">
+              <a:rPr lang="en-US" sz="1100" dirty="0">
                 <a:solidFill>
                   <a:srgbClr val="5F6B63"/>
                 </a:solidFill>
@@ -6071,21 +6377,21 @@
                 <a:ea typeface="Calibri" pitchFamily="34" charset="-122"/>
                 <a:cs typeface="Calibri" pitchFamily="34" charset="-120"/>
               </a:rPr>
-              <a:t>Rotate to crops with different calendars, and offer the same room for seed, dairy and mango season overflow.</a:t>
-            </a:r>
-            <a:endParaRPr lang="en-US" sz="1150" dirty="0"/>
-          </a:p>
-        </p:txBody>
-      </p:sp>
-      <p:sp>
-        <p:nvSpPr>
-          <p:cNvPr id="18" name="Shape 16"/>
-          <p:cNvSpPr/>
-          <p:nvPr/>
-        </p:nvSpPr>
-        <p:spPr>
-          <a:xfrm>
-            <a:off x="822960" y="4123944"/>
+              <a:t>A service contract with the supplier from day one, spare parts held locally, and a small generator that can run the compressor alone.</a:t>
+            </a:r>
+            <a:endParaRPr lang="en-US" sz="1100" dirty="0"/>
+          </a:p>
+        </p:txBody>
+      </p:sp>
+      <p:sp>
+        <p:nvSpPr>
+          <p:cNvPr id="27" name="Shape 25"/>
+          <p:cNvSpPr/>
+          <p:nvPr/>
+        </p:nvSpPr>
+        <p:spPr>
+          <a:xfrm>
+            <a:off x="822960" y="5266944"/>
             <a:ext cx="329184" cy="329184"/>
           </a:xfrm>
           <a:prstGeom prst="ellipse">
@@ -6099,13 +6405,13 @@
       </p:sp>
       <p:sp>
         <p:nvSpPr>
-          <p:cNvPr id="19" name="Text 17"/>
-          <p:cNvSpPr/>
-          <p:nvPr/>
-        </p:nvSpPr>
-        <p:spPr>
-          <a:xfrm>
-            <a:off x="822960" y="4123944"/>
+          <p:cNvPr id="28" name="Text 26"/>
+          <p:cNvSpPr/>
+          <p:nvPr/>
+        </p:nvSpPr>
+        <p:spPr>
+          <a:xfrm>
+            <a:off x="822960" y="5266944"/>
             <a:ext cx="329184" cy="329184"/>
           </a:xfrm>
           <a:prstGeom prst="rect">
@@ -6130,7 +6436,7 @@
                 <a:ea typeface="Calibri" pitchFamily="34" charset="-122"/>
                 <a:cs typeface="Calibri" pitchFamily="34" charset="-120"/>
               </a:rPr>
-              <a:t>4</a:t>
+              <a:t>6</a:t>
             </a:r>
             <a:endParaRPr lang="en-US" sz="1350" dirty="0"/>
           </a:p>
@@ -6138,14 +6444,14 @@
       </p:sp>
       <p:sp>
         <p:nvSpPr>
-          <p:cNvPr id="20" name="Text 18"/>
-          <p:cNvSpPr/>
-          <p:nvPr/>
-        </p:nvSpPr>
-        <p:spPr>
-          <a:xfrm>
-            <a:off x="1280160" y="4041648"/>
-            <a:ext cx="3566160" cy="530352"/>
+          <p:cNvPr id="29" name="Text 27"/>
+          <p:cNvSpPr/>
+          <p:nvPr/>
+        </p:nvSpPr>
+        <p:spPr>
+          <a:xfrm>
+            <a:off x="1280160" y="5166360"/>
+            <a:ext cx="3566160" cy="548640"/>
           </a:xfrm>
           <a:prstGeom prst="rect">
             <a:avLst/>
@@ -6159,12 +6465,12 @@
           <a:p>
             <a:pPr indent="0" marL="0">
               <a:lnSpc>
-                <a:spcPts val="1600"/>
+                <a:spcPts val="1500"/>
               </a:lnSpc>
               <a:buNone/>
             </a:pPr>
             <a:r>
-              <a:rPr lang="en-US" sz="1300" b="1" dirty="0">
+              <a:rPr lang="en-US" sz="1250" b="1" dirty="0">
                 <a:solidFill>
                   <a:srgbClr val="1A1A1A"/>
                 </a:solidFill>
@@ -6172,22 +6478,22 @@
                 <a:ea typeface="Cambria" pitchFamily="34" charset="-122"/>
                 <a:cs typeface="Cambria" pitchFamily="34" charset="-120"/>
               </a:rPr>
-              <a:t>Solar or compressor breakdown</a:t>
-            </a:r>
-            <a:endParaRPr lang="en-US" sz="1300" dirty="0"/>
-          </a:p>
-        </p:txBody>
-      </p:sp>
-      <p:sp>
-        <p:nvSpPr>
-          <p:cNvPr id="21" name="Text 19"/>
-          <p:cNvSpPr/>
-          <p:nvPr/>
-        </p:nvSpPr>
-        <p:spPr>
-          <a:xfrm>
-            <a:off x="5029200" y="4041648"/>
-            <a:ext cx="6492240" cy="530352"/>
+              <a:t>The commission agent works against us</a:t>
+            </a:r>
+            <a:endParaRPr lang="en-US" sz="1250" dirty="0"/>
+          </a:p>
+        </p:txBody>
+      </p:sp>
+      <p:sp>
+        <p:nvSpPr>
+          <p:cNvPr id="30" name="Text 28"/>
+          <p:cNvSpPr/>
+          <p:nvPr/>
+        </p:nvSpPr>
+        <p:spPr>
+          <a:xfrm>
+            <a:off x="5029200" y="5166360"/>
+            <a:ext cx="6492240" cy="548640"/>
           </a:xfrm>
           <a:prstGeom prst="rect">
             <a:avLst/>
@@ -6201,12 +6507,12 @@
           <a:p>
             <a:pPr indent="0" marL="0">
               <a:lnSpc>
-                <a:spcPts val="1400"/>
+                <a:spcPts val="1350"/>
               </a:lnSpc>
               <a:buNone/>
             </a:pPr>
             <a:r>
-              <a:rPr lang="en-US" sz="1150" dirty="0">
+              <a:rPr lang="en-US" sz="1100" dirty="0">
                 <a:solidFill>
                   <a:srgbClr val="5F6B63"/>
                 </a:solidFill>
@@ -6214,22 +6520,22 @@
                 <a:ea typeface="Calibri" pitchFamily="34" charset="-122"/>
                 <a:cs typeface="Calibri" pitchFamily="34" charset="-120"/>
               </a:rPr>
-              <a:t>A service contract with the supplier from day one, spare parts held locally, and a small generator that can run the compressor alone.</a:t>
-            </a:r>
-            <a:endParaRPr lang="en-US" sz="1150" dirty="0"/>
-          </a:p>
-        </p:txBody>
-      </p:sp>
-      <p:sp>
-        <p:nvSpPr>
-          <p:cNvPr id="22" name="Shape 20"/>
-          <p:cNvSpPr/>
-          <p:nvPr/>
-        </p:nvSpPr>
-        <p:spPr>
-          <a:xfrm>
-            <a:off x="640080" y="4700016"/>
-            <a:ext cx="10881360" cy="676656"/>
+              <a:t>He is offered crate space at the same rate as everyone else. We compete with his storage, not with his credit.</a:t>
+            </a:r>
+            <a:endParaRPr lang="en-US" sz="1100" dirty="0"/>
+          </a:p>
+        </p:txBody>
+      </p:sp>
+      <p:sp>
+        <p:nvSpPr>
+          <p:cNvPr id="31" name="Shape 29"/>
+          <p:cNvSpPr/>
+          <p:nvPr/>
+        </p:nvSpPr>
+        <p:spPr>
+          <a:xfrm>
+            <a:off x="640080" y="5779008"/>
+            <a:ext cx="10881360" cy="630936"/>
           </a:xfrm>
           <a:prstGeom prst="rect">
             <a:avLst/>
@@ -6242,13 +6548,13 @@
       </p:sp>
       <p:sp>
         <p:nvSpPr>
-          <p:cNvPr id="23" name="Shape 21"/>
-          <p:cNvSpPr/>
-          <p:nvPr/>
-        </p:nvSpPr>
-        <p:spPr>
-          <a:xfrm>
-            <a:off x="822960" y="4846320"/>
+          <p:cNvPr id="32" name="Shape 30"/>
+          <p:cNvSpPr/>
+          <p:nvPr/>
+        </p:nvSpPr>
+        <p:spPr>
+          <a:xfrm>
+            <a:off x="822960" y="5934456"/>
             <a:ext cx="329184" cy="329184"/>
           </a:xfrm>
           <a:prstGeom prst="ellipse">
@@ -6262,13 +6568,13 @@
       </p:sp>
       <p:sp>
         <p:nvSpPr>
-          <p:cNvPr id="24" name="Text 22"/>
-          <p:cNvSpPr/>
-          <p:nvPr/>
-        </p:nvSpPr>
-        <p:spPr>
-          <a:xfrm>
-            <a:off x="822960" y="4846320"/>
+          <p:cNvPr id="33" name="Text 31"/>
+          <p:cNvSpPr/>
+          <p:nvPr/>
+        </p:nvSpPr>
+        <p:spPr>
+          <a:xfrm>
+            <a:off x="822960" y="5934456"/>
             <a:ext cx="329184" cy="329184"/>
           </a:xfrm>
           <a:prstGeom prst="rect">
@@ -6293,7 +6599,7 @@
                 <a:ea typeface="Calibri" pitchFamily="34" charset="-122"/>
                 <a:cs typeface="Calibri" pitchFamily="34" charset="-120"/>
               </a:rPr>
-              <a:t>5</a:t>
+              <a:t>7</a:t>
             </a:r>
             <a:endParaRPr lang="en-US" sz="1350" dirty="0"/>
           </a:p>
@@ -6301,14 +6607,14 @@
       </p:sp>
       <p:sp>
         <p:nvSpPr>
-          <p:cNvPr id="25" name="Text 23"/>
-          <p:cNvSpPr/>
-          <p:nvPr/>
-        </p:nvSpPr>
-        <p:spPr>
-          <a:xfrm>
-            <a:off x="1280160" y="4764024"/>
-            <a:ext cx="3566160" cy="530352"/>
+          <p:cNvPr id="34" name="Text 32"/>
+          <p:cNvSpPr/>
+          <p:nvPr/>
+        </p:nvSpPr>
+        <p:spPr>
+          <a:xfrm>
+            <a:off x="1280160" y="5833872"/>
+            <a:ext cx="3566160" cy="548640"/>
           </a:xfrm>
           <a:prstGeom prst="rect">
             <a:avLst/>
@@ -6322,12 +6628,12 @@
           <a:p>
             <a:pPr indent="0" marL="0">
               <a:lnSpc>
-                <a:spcPts val="1600"/>
+                <a:spcPts val="1500"/>
               </a:lnSpc>
               <a:buNone/>
             </a:pPr>
             <a:r>
-              <a:rPr lang="en-US" sz="1300" b="1" dirty="0">
+              <a:rPr lang="en-US" sz="1250" b="1" dirty="0">
                 <a:solidFill>
                   <a:srgbClr val="1A1A1A"/>
                 </a:solidFill>
@@ -6335,22 +6641,22 @@
                 <a:ea typeface="Cambria" pitchFamily="34" charset="-122"/>
                 <a:cs typeface="Cambria" pitchFamily="34" charset="-120"/>
               </a:rPr>
-              <a:t>The commission agent works against us</a:t>
-            </a:r>
-            <a:endParaRPr lang="en-US" sz="1300" dirty="0"/>
-          </a:p>
-        </p:txBody>
-      </p:sp>
-      <p:sp>
-        <p:nvSpPr>
-          <p:cNvPr id="26" name="Text 24"/>
-          <p:cNvSpPr/>
-          <p:nvPr/>
-        </p:nvSpPr>
-        <p:spPr>
-          <a:xfrm>
-            <a:off x="5029200" y="4764024"/>
-            <a:ext cx="6492240" cy="530352"/>
+              <a:t>Capital does not arrive</a:t>
+            </a:r>
+            <a:endParaRPr lang="en-US" sz="1250" dirty="0"/>
+          </a:p>
+        </p:txBody>
+      </p:sp>
+      <p:sp>
+        <p:nvSpPr>
+          <p:cNvPr id="35" name="Text 33"/>
+          <p:cNvSpPr/>
+          <p:nvPr/>
+        </p:nvSpPr>
+        <p:spPr>
+          <a:xfrm>
+            <a:off x="5029200" y="5833872"/>
+            <a:ext cx="6492240" cy="548640"/>
           </a:xfrm>
           <a:prstGeom prst="rect">
             <a:avLst/>
@@ -6364,12 +6670,12 @@
           <a:p>
             <a:pPr indent="0" marL="0">
               <a:lnSpc>
-                <a:spcPts val="1400"/>
+                <a:spcPts val="1350"/>
               </a:lnSpc>
               <a:buNone/>
             </a:pPr>
             <a:r>
-              <a:rPr lang="en-US" sz="1150" dirty="0">
+              <a:rPr lang="en-US" sz="1100" dirty="0">
                 <a:solidFill>
                   <a:srgbClr val="5F6B63"/>
                 </a:solidFill>
@@ -6377,152 +6683,9 @@
                 <a:ea typeface="Calibri" pitchFamily="34" charset="-122"/>
                 <a:cs typeface="Calibri" pitchFamily="34" charset="-120"/>
               </a:rPr>
-              <a:t>He is offered crate space at the same rate as everyone else. We compete with his storage, not with his credit.</a:t>
-            </a:r>
-            <a:endParaRPr lang="en-US" sz="1150" dirty="0"/>
-          </a:p>
-        </p:txBody>
-      </p:sp>
-      <p:sp>
-        <p:nvSpPr>
-          <p:cNvPr id="27" name="Shape 25"/>
-          <p:cNvSpPr/>
-          <p:nvPr/>
-        </p:nvSpPr>
-        <p:spPr>
-          <a:xfrm>
-            <a:off x="822960" y="5568696"/>
-            <a:ext cx="329184" cy="329184"/>
-          </a:xfrm>
-          <a:prstGeom prst="ellipse">
-            <a:avLst/>
-          </a:prstGeom>
-          <a:solidFill>
-            <a:srgbClr val="2E7D5B"/>
-          </a:solidFill>
-          <a:ln/>
-        </p:spPr>
-      </p:sp>
-      <p:sp>
-        <p:nvSpPr>
-          <p:cNvPr id="28" name="Text 26"/>
-          <p:cNvSpPr/>
-          <p:nvPr/>
-        </p:nvSpPr>
-        <p:spPr>
-          <a:xfrm>
-            <a:off x="822960" y="5568696"/>
-            <a:ext cx="329184" cy="329184"/>
-          </a:xfrm>
-          <a:prstGeom prst="rect">
-            <a:avLst/>
-          </a:prstGeom>
-          <a:noFill/>
-          <a:ln/>
-        </p:spPr>
-        <p:txBody>
-          <a:bodyPr wrap="square" lIns="0" tIns="0" rIns="0" bIns="0" rtlCol="0" anchor="ctr"/>
-          <a:lstStyle/>
-          <a:p>
-            <a:pPr algn="ctr" indent="0" marL="0">
-              <a:buNone/>
-            </a:pPr>
-            <a:r>
-              <a:rPr lang="en-US" sz="1350" b="1" dirty="0">
-                <a:solidFill>
-                  <a:srgbClr val="FFFFFF"/>
-                </a:solidFill>
-                <a:latin typeface="Calibri" pitchFamily="34" charset="0"/>
-                <a:ea typeface="Calibri" pitchFamily="34" charset="-122"/>
-                <a:cs typeface="Calibri" pitchFamily="34" charset="-120"/>
-              </a:rPr>
-              <a:t>6</a:t>
-            </a:r>
-            <a:endParaRPr lang="en-US" sz="1350" dirty="0"/>
-          </a:p>
-        </p:txBody>
-      </p:sp>
-      <p:sp>
-        <p:nvSpPr>
-          <p:cNvPr id="29" name="Text 27"/>
-          <p:cNvSpPr/>
-          <p:nvPr/>
-        </p:nvSpPr>
-        <p:spPr>
-          <a:xfrm>
-            <a:off x="1280160" y="5486400"/>
-            <a:ext cx="3566160" cy="530352"/>
-          </a:xfrm>
-          <a:prstGeom prst="rect">
-            <a:avLst/>
-          </a:prstGeom>
-          <a:noFill/>
-          <a:ln/>
-        </p:spPr>
-        <p:txBody>
-          <a:bodyPr wrap="square" lIns="0" tIns="0" rIns="0" bIns="0" rtlCol="0" anchor="ctr"/>
-          <a:lstStyle/>
-          <a:p>
-            <a:pPr indent="0" marL="0">
-              <a:lnSpc>
-                <a:spcPts val="1600"/>
-              </a:lnSpc>
-              <a:buNone/>
-            </a:pPr>
-            <a:r>
-              <a:rPr lang="en-US" sz="1300" b="1" dirty="0">
-                <a:solidFill>
-                  <a:srgbClr val="1A1A1A"/>
-                </a:solidFill>
-                <a:latin typeface="Cambria" pitchFamily="34" charset="0"/>
-                <a:ea typeface="Cambria" pitchFamily="34" charset="-122"/>
-                <a:cs typeface="Cambria" pitchFamily="34" charset="-120"/>
-              </a:rPr>
-              <a:t>Capital does not arrive</a:t>
-            </a:r>
-            <a:endParaRPr lang="en-US" sz="1300" dirty="0"/>
-          </a:p>
-        </p:txBody>
-      </p:sp>
-      <p:sp>
-        <p:nvSpPr>
-          <p:cNvPr id="30" name="Text 28"/>
-          <p:cNvSpPr/>
-          <p:nvPr/>
-        </p:nvSpPr>
-        <p:spPr>
-          <a:xfrm>
-            <a:off x="5029200" y="5486400"/>
-            <a:ext cx="6492240" cy="530352"/>
-          </a:xfrm>
-          <a:prstGeom prst="rect">
-            <a:avLst/>
-          </a:prstGeom>
-          <a:noFill/>
-          <a:ln/>
-        </p:spPr>
-        <p:txBody>
-          <a:bodyPr wrap="square" lIns="0" tIns="0" rIns="0" bIns="0" rtlCol="0" anchor="ctr"/>
-          <a:lstStyle/>
-          <a:p>
-            <a:pPr indent="0" marL="0">
-              <a:lnSpc>
-                <a:spcPts val="1400"/>
-              </a:lnSpc>
-              <a:buNone/>
-            </a:pPr>
-            <a:r>
-              <a:rPr lang="en-US" sz="1150" dirty="0">
-                <a:solidFill>
-                  <a:srgbClr val="5F6B63"/>
-                </a:solidFill>
-                <a:latin typeface="Calibri" pitchFamily="34" charset="0"/>
-                <a:ea typeface="Calibri" pitchFamily="34" charset="-122"/>
-                <a:cs typeface="Calibri" pitchFamily="34" charset="-120"/>
-              </a:rPr>
               <a:t>We can start with a 2 tonne room at a much lower cost and grow from the surplus, which delays the plan but does not end it.</a:t>
             </a:r>
-            <a:endParaRPr lang="en-US" sz="1150" dirty="0"/>
+            <a:endParaRPr lang="en-US" sz="1100" dirty="0"/>
           </a:p>
         </p:txBody>
       </p:sp>
@@ -7678,8 +7841,8 @@
         </p:nvSpPr>
         <p:spPr>
           <a:xfrm>
-            <a:off x="640080" y="1691640"/>
-            <a:ext cx="5303520" cy="3291840"/>
+            <a:off x="640080" y="1645920"/>
+            <a:ext cx="5303520" cy="3200400"/>
           </a:xfrm>
           <a:prstGeom prst="rect">
             <a:avLst/>
@@ -7693,16 +7856,16 @@
           <a:p>
             <a:pPr marL="342900" indent="-342900">
               <a:lnSpc>
-                <a:spcPts val="1600"/>
+                <a:spcPts val="1500"/>
               </a:lnSpc>
               <a:spcAft>
-                <a:spcPts val="1000"/>
+                <a:spcPts val="900"/>
               </a:spcAft>
               <a:buSzPct val="100000"/>
               <a:buChar char="•"/>
             </a:pPr>
             <a:r>
-              <a:rPr lang="en-US" sz="1200" dirty="0">
+              <a:rPr lang="en-US" sz="1100" dirty="0">
                 <a:solidFill>
                   <a:srgbClr val="1A1A1A"/>
                 </a:solidFill>
@@ -7712,21 +7875,21 @@
               </a:rPr>
               <a:t>Pakistan Bureau of Statistics, 7th Agricultural Census, reported by Profit and The Express Tribune, August 2025. Farm size distribution.</a:t>
             </a:r>
-            <a:endParaRPr lang="en-US" sz="1200" dirty="0"/>
+            <a:endParaRPr lang="en-US" sz="1100" dirty="0"/>
           </a:p>
           <a:p>
             <a:pPr marL="342900" indent="-342900">
               <a:lnSpc>
-                <a:spcPts val="1600"/>
+                <a:spcPts val="1500"/>
               </a:lnSpc>
               <a:spcAft>
-                <a:spcPts val="1000"/>
+                <a:spcPts val="900"/>
               </a:spcAft>
               <a:buSzPct val="100000"/>
               <a:buChar char="•"/>
             </a:pPr>
             <a:r>
-              <a:rPr lang="en-US" sz="1200" dirty="0">
+              <a:rPr lang="en-US" sz="1100" dirty="0">
                 <a:solidFill>
                   <a:srgbClr val="1A1A1A"/>
                 </a:solidFill>
@@ -7736,21 +7899,21 @@
               </a:rPr>
               <a:t>Asian Development Bank estimate on post harvest losses, reported in Dawn.</a:t>
             </a:r>
-            <a:endParaRPr lang="en-US" sz="1200" dirty="0"/>
+            <a:endParaRPr lang="en-US" sz="1100" dirty="0"/>
           </a:p>
           <a:p>
             <a:pPr marL="342900" indent="-342900">
               <a:lnSpc>
-                <a:spcPts val="1600"/>
+                <a:spcPts val="1500"/>
               </a:lnSpc>
               <a:spcAft>
-                <a:spcPts val="1000"/>
+                <a:spcPts val="900"/>
               </a:spcAft>
               <a:buSzPct val="100000"/>
               <a:buChar char="•"/>
             </a:pPr>
             <a:r>
-              <a:rPr lang="en-US" sz="1200" dirty="0">
+              <a:rPr lang="en-US" sz="1100" dirty="0">
                 <a:solidFill>
                   <a:srgbClr val="1A1A1A"/>
                 </a:solidFill>
@@ -7760,21 +7923,21 @@
               </a:rPr>
               <a:t>Pakistan Today and FreshPlaza, 2026. Forty percent post harvest losses and the cold storage gap.</a:t>
             </a:r>
-            <a:endParaRPr lang="en-US" sz="1200" dirty="0"/>
+            <a:endParaRPr lang="en-US" sz="1100" dirty="0"/>
           </a:p>
           <a:p>
             <a:pPr marL="342900" indent="-342900">
               <a:lnSpc>
-                <a:spcPts val="1600"/>
+                <a:spcPts val="1500"/>
               </a:lnSpc>
               <a:spcAft>
-                <a:spcPts val="1000"/>
+                <a:spcPts val="900"/>
               </a:spcAft>
               <a:buSzPct val="100000"/>
               <a:buChar char="•"/>
             </a:pPr>
             <a:r>
-              <a:rPr lang="en-US" sz="1200" dirty="0">
+              <a:rPr lang="en-US" sz="1100" dirty="0">
                 <a:solidFill>
                   <a:srgbClr val="1A1A1A"/>
                 </a:solidFill>
@@ -7784,43 +7947,21 @@
               </a:rPr>
               <a:t>AgriHunt. Stage by stage breakdown of losses in fruits and vegetables.</a:t>
             </a:r>
-            <a:endParaRPr lang="en-US" sz="1200" dirty="0"/>
-          </a:p>
-        </p:txBody>
-      </p:sp>
-      <p:sp>
-        <p:nvSpPr>
-          <p:cNvPr id="5" name="Text 3"/>
-          <p:cNvSpPr/>
-          <p:nvPr/>
-        </p:nvSpPr>
-        <p:spPr>
-          <a:xfrm>
-            <a:off x="6309360" y="1691640"/>
-            <a:ext cx="5212080" cy="3291840"/>
-          </a:xfrm>
-          <a:prstGeom prst="rect">
-            <a:avLst/>
-          </a:prstGeom>
-          <a:noFill/>
-          <a:ln/>
-        </p:spPr>
-        <p:txBody>
-          <a:bodyPr wrap="square" lIns="0" tIns="0" rIns="0" bIns="0" rtlCol="0" anchor="t"/>
-          <a:lstStyle/>
+            <a:endParaRPr lang="en-US" sz="1100" dirty="0"/>
+          </a:p>
           <a:p>
             <a:pPr marL="342900" indent="-342900">
               <a:lnSpc>
-                <a:spcPts val="1600"/>
+                <a:spcPts val="1500"/>
               </a:lnSpc>
               <a:spcAft>
-                <a:spcPts val="1000"/>
+                <a:spcPts val="900"/>
               </a:spcAft>
               <a:buSzPct val="100000"/>
               <a:buChar char="•"/>
             </a:pPr>
             <a:r>
-              <a:rPr lang="en-US" sz="1200" dirty="0">
+              <a:rPr lang="en-US" sz="1100" dirty="0">
                 <a:solidFill>
                   <a:srgbClr val="1A1A1A"/>
                 </a:solidFill>
@@ -7830,21 +7971,43 @@
               </a:rPr>
               <a:t>The Express Tribune, 2026. Storage fund set against farm losses.</a:t>
             </a:r>
-            <a:endParaRPr lang="en-US" sz="1200" dirty="0"/>
-          </a:p>
+            <a:endParaRPr lang="en-US" sz="1100" dirty="0"/>
+          </a:p>
+        </p:txBody>
+      </p:sp>
+      <p:sp>
+        <p:nvSpPr>
+          <p:cNvPr id="5" name="Text 3"/>
+          <p:cNvSpPr/>
+          <p:nvPr/>
+        </p:nvSpPr>
+        <p:spPr>
+          <a:xfrm>
+            <a:off x="6309360" y="1645920"/>
+            <a:ext cx="5212080" cy="3200400"/>
+          </a:xfrm>
+          <a:prstGeom prst="rect">
+            <a:avLst/>
+          </a:prstGeom>
+          <a:noFill/>
+          <a:ln/>
+        </p:spPr>
+        <p:txBody>
+          <a:bodyPr wrap="square" lIns="0" tIns="0" rIns="0" bIns="0" rtlCol="0" anchor="t"/>
+          <a:lstStyle/>
           <a:p>
             <a:pPr marL="342900" indent="-342900">
               <a:lnSpc>
-                <a:spcPts val="1600"/>
+                <a:spcPts val="1500"/>
               </a:lnSpc>
               <a:spcAft>
-                <a:spcPts val="1000"/>
+                <a:spcPts val="900"/>
               </a:spcAft>
               <a:buSzPct val="100000"/>
               <a:buChar char="•"/>
             </a:pPr>
             <a:r>
-              <a:rPr lang="en-US" sz="1200" dirty="0">
+              <a:rPr lang="en-US" sz="1100" dirty="0">
                 <a:solidFill>
                   <a:srgbClr val="1A1A1A"/>
                 </a:solidFill>
@@ -7852,23 +8015,23 @@
                 <a:ea typeface="Calibri" pitchFamily="34" charset="-122"/>
                 <a:cs typeface="Calibri" pitchFamily="34" charset="-120"/>
               </a:rPr>
-              <a:t>International Growth Centre, PAK-22066, March 2023. Understanding the fresh produce supply chain.</a:t>
-            </a:r>
-            <a:endParaRPr lang="en-US" sz="1200" dirty="0"/>
+              <a:t>Dawn, 2026. Punjab potato growers face collapse as oversupply deepens. Prices of PKR 20 to 25 a kg and per acre losses.</a:t>
+            </a:r>
+            <a:endParaRPr lang="en-US" sz="1100" dirty="0"/>
           </a:p>
           <a:p>
             <a:pPr marL="342900" indent="-342900">
               <a:lnSpc>
-                <a:spcPts val="1600"/>
+                <a:spcPts val="1500"/>
               </a:lnSpc>
               <a:spcAft>
-                <a:spcPts val="1000"/>
+                <a:spcPts val="900"/>
               </a:spcAft>
               <a:buSzPct val="100000"/>
               <a:buChar char="•"/>
             </a:pPr>
             <a:r>
-              <a:rPr lang="en-US" sz="1200" dirty="0">
+              <a:rPr lang="en-US" sz="1100" dirty="0">
                 <a:solidFill>
                   <a:srgbClr val="1A1A1A"/>
                 </a:solidFill>
@@ -7876,23 +8039,23 @@
                 <a:ea typeface="Calibri" pitchFamily="34" charset="-122"/>
                 <a:cs typeface="Calibri" pitchFamily="34" charset="-120"/>
               </a:rPr>
-              <a:t>PIDE. The role of the middleman and neglected aspects.</a:t>
-            </a:r>
-            <a:endParaRPr lang="en-US" sz="1200" dirty="0"/>
+              <a:t>Pakistan Today, August 2026. Tomato moving from roughly PKR 90 to PKR 400 and above a kg.</a:t>
+            </a:r>
+            <a:endParaRPr lang="en-US" sz="1100" dirty="0"/>
           </a:p>
           <a:p>
             <a:pPr marL="342900" indent="-342900">
               <a:lnSpc>
-                <a:spcPts val="1600"/>
+                <a:spcPts val="1500"/>
               </a:lnSpc>
               <a:spcAft>
-                <a:spcPts val="1000"/>
+                <a:spcPts val="900"/>
               </a:spcAft>
               <a:buSzPct val="100000"/>
               <a:buChar char="•"/>
             </a:pPr>
             <a:r>
-              <a:rPr lang="en-US" sz="1200" dirty="0">
+              <a:rPr lang="en-US" sz="1100" dirty="0">
                 <a:solidFill>
                   <a:srgbClr val="1A1A1A"/>
                 </a:solidFill>
@@ -7900,23 +8063,23 @@
                 <a:ea typeface="Calibri" pitchFamily="34" charset="-122"/>
                 <a:cs typeface="Calibri" pitchFamily="34" charset="-120"/>
               </a:rPr>
-              <a:t>Arab News and Dawn reporting on the arhti system and farmer share of the retail price.</a:t>
-            </a:r>
-            <a:endParaRPr lang="en-US" sz="1200" dirty="0"/>
+              <a:t>Pakistan Horticulture Development and Export Company, potato challenges and prospects in Okara.</a:t>
+            </a:r>
+            <a:endParaRPr lang="en-US" sz="1100" dirty="0"/>
           </a:p>
           <a:p>
             <a:pPr marL="342900" indent="-342900">
               <a:lnSpc>
-                <a:spcPts val="1600"/>
+                <a:spcPts val="1500"/>
               </a:lnSpc>
               <a:spcAft>
-                <a:spcPts val="1000"/>
+                <a:spcPts val="900"/>
               </a:spcAft>
               <a:buSzPct val="100000"/>
               <a:buChar char="•"/>
             </a:pPr>
             <a:r>
-              <a:rPr lang="en-US" sz="1200" dirty="0">
+              <a:rPr lang="en-US" sz="1100" dirty="0">
                 <a:solidFill>
                   <a:srgbClr val="1A1A1A"/>
                 </a:solidFill>
@@ -7924,9 +8087,57 @@
                 <a:ea typeface="Calibri" pitchFamily="34" charset="-122"/>
                 <a:cs typeface="Calibri" pitchFamily="34" charset="-120"/>
               </a:rPr>
-              <a:t>Trade press on cold storage build cost and rental rates in Pakistan, 2026.</a:t>
-            </a:r>
-            <a:endParaRPr lang="en-US" sz="1200" dirty="0"/>
+              <a:t>International Growth Centre, PAK-22066, March 2023. Understanding the fresh produce supply chain.</a:t>
+            </a:r>
+            <a:endParaRPr lang="en-US" sz="1100" dirty="0"/>
+          </a:p>
+          <a:p>
+            <a:pPr marL="342900" indent="-342900">
+              <a:lnSpc>
+                <a:spcPts val="1500"/>
+              </a:lnSpc>
+              <a:spcAft>
+                <a:spcPts val="900"/>
+              </a:spcAft>
+              <a:buSzPct val="100000"/>
+              <a:buChar char="•"/>
+            </a:pPr>
+            <a:r>
+              <a:rPr lang="en-US" sz="1100" dirty="0">
+                <a:solidFill>
+                  <a:srgbClr val="1A1A1A"/>
+                </a:solidFill>
+                <a:latin typeface="Calibri" pitchFamily="34" charset="0"/>
+                <a:ea typeface="Calibri" pitchFamily="34" charset="-122"/>
+                <a:cs typeface="Calibri" pitchFamily="34" charset="-120"/>
+              </a:rPr>
+              <a:t>PIDE. The role of the middleman and neglected aspects. Arab News and Dawn on the arhti system.</a:t>
+            </a:r>
+            <a:endParaRPr lang="en-US" sz="1100" dirty="0"/>
+          </a:p>
+          <a:p>
+            <a:pPr marL="342900" indent="-342900">
+              <a:lnSpc>
+                <a:spcPts val="1500"/>
+              </a:lnSpc>
+              <a:spcAft>
+                <a:spcPts val="900"/>
+              </a:spcAft>
+              <a:buSzPct val="100000"/>
+              <a:buChar char="•"/>
+            </a:pPr>
+            <a:r>
+              <a:rPr lang="en-US" sz="1100" dirty="0">
+                <a:solidFill>
+                  <a:srgbClr val="1A1A1A"/>
+                </a:solidFill>
+                <a:latin typeface="Calibri" pitchFamily="34" charset="0"/>
+                <a:ea typeface="Calibri" pitchFamily="34" charset="-122"/>
+                <a:cs typeface="Calibri" pitchFamily="34" charset="-120"/>
+              </a:rPr>
+              <a:t>Post harvest trials on Punjab tomato varieties comparing ambient storage with 10 degrees at 90 to 95 percent humidity.</a:t>
+            </a:r>
+            <a:endParaRPr lang="en-US" sz="1100" dirty="0"/>
           </a:p>
         </p:txBody>
       </p:sp>
@@ -7938,12 +8149,12 @@
         </p:nvSpPr>
         <p:spPr>
           <a:xfrm>
-            <a:off x="640080" y="5120640"/>
-            <a:ext cx="10881360" cy="1005840"/>
+            <a:off x="640080" y="5029200"/>
+            <a:ext cx="10881360" cy="1051560"/>
           </a:xfrm>
           <a:prstGeom prst="roundRect">
             <a:avLst>
-              <a:gd name="adj" fmla="val 7273"/>
+              <a:gd name="adj" fmla="val 6957"/>
             </a:avLst>
           </a:prstGeom>
           <a:solidFill>
@@ -7967,8 +8178,8 @@
         </p:nvSpPr>
         <p:spPr>
           <a:xfrm>
-            <a:off x="1024128" y="5303520"/>
-            <a:ext cx="10424160" cy="640080"/>
+            <a:off x="1024128" y="5212080"/>
+            <a:ext cx="10424160" cy="685800"/>
           </a:xfrm>
           <a:prstGeom prst="rect">
             <a:avLst/>
@@ -7995,7 +8206,7 @@
                 <a:ea typeface="Calibri" pitchFamily="34" charset="-122"/>
                 <a:cs typeface="Calibri" pitchFamily="34" charset="-120"/>
               </a:rPr>
-              <a:t>Figures we produced ourselves and have marked as estimates: the PKR 2.5 million build cost, the 60 percent occupancy assumption, the 7 percent aggregation margin, and the 300 to 400 household catchment.</a:t>
+              <a:t>Figures that are ours rather than published, and are marked as such on the slides: the PKR 2.5 million build cost, the 60 percent occupancy assumption, the 7 percent aggregation margin, the PKR 12 crate price, and the 300 to 400 household catchment.</a:t>
             </a:r>
             <a:endParaRPr lang="en-US" sz="1250" dirty="0"/>
           </a:p>
@@ -9685,7 +9896,7 @@
                 <a:ea typeface="Calibri" pitchFamily="34" charset="-122"/>
                 <a:cs typeface="Calibri" pitchFamily="34" charset="-120"/>
               </a:rPr>
-              <a:t>Everyone in the chain who can wait, earns more. The commission agent can wait, so he captures the price movement. The grower typically ends up with 20 to 30 percent of what the customer finally pays in the city.</a:t>
+              <a:t>Tomato went from roughly PKR 90 a kg to PKR 400 and above within a few weeks this year. Everyone in the chain who can wait captures that movement. The grower, who cannot, ends up with 20 to 30 percent of what the customer finally pays.</a:t>
             </a:r>
             <a:endParaRPr lang="en-US" sz="1350" dirty="0"/>
           </a:p>
@@ -11104,7 +11315,7 @@
                 <a:ea typeface="Cambria" pitchFamily="34" charset="-122"/>
                 <a:cs typeface="Cambria" pitchFamily="34" charset="-120"/>
               </a:rPr>
-              <a:t>Field research</a:t>
+              <a:t>The three questions that decide it</a:t>
             </a:r>
             <a:endParaRPr lang="en-US" sz="1800" dirty="0"/>
           </a:p>
@@ -11128,7 +11339,7 @@
           <a:ln/>
         </p:spPr>
         <p:txBody>
-          <a:bodyPr wrap="square" lIns="0" tIns="0" rIns="0" bIns="0" rtlCol="0" anchor="ctr"/>
+          <a:bodyPr wrap="square" lIns="0" tIns="0" rIns="0" bIns="0" rtlCol="0" anchor="t"/>
           <a:lstStyle/>
           <a:p>
             <a:pPr indent="0" marL="0">
@@ -11143,7 +11354,7 @@
                 <a:ea typeface="Calibri" pitchFamily="34" charset="-122"/>
                 <a:cs typeface="Calibri" pitchFamily="34" charset="-120"/>
               </a:rPr>
-              <a:t>12 growers, 3 commission agents, 2 cold storage operators</a:t>
+              <a:t>From published evidence. Growers interviewed next.</a:t>
             </a:r>
             <a:endParaRPr lang="en-US" sz="1150" dirty="0"/>
           </a:p>
@@ -11157,8 +11368,8 @@
         </p:nvSpPr>
         <p:spPr>
           <a:xfrm>
-            <a:off x="6766560" y="2807208"/>
-            <a:ext cx="310896" cy="310896"/>
+            <a:off x="6766560" y="2880360"/>
+            <a:ext cx="292608" cy="292608"/>
           </a:xfrm>
           <a:prstGeom prst="ellipse">
             <a:avLst/>
@@ -11177,8 +11388,8 @@
         </p:nvSpPr>
         <p:spPr>
           <a:xfrm>
-            <a:off x="6766560" y="2807208"/>
-            <a:ext cx="310896" cy="310896"/>
+            <a:off x="6766560" y="2880360"/>
+            <a:ext cx="292608" cy="292608"/>
           </a:xfrm>
           <a:prstGeom prst="rect">
             <a:avLst/>
@@ -11202,7 +11413,7 @@
                 <a:ea typeface="Calibri" pitchFamily="34" charset="-122"/>
                 <a:cs typeface="Calibri" pitchFamily="34" charset="-120"/>
               </a:rPr>
-              <a:t>?</a:t>
+              <a:t>1</a:t>
             </a:r>
             <a:endParaRPr lang="en-US" sz="1350" dirty="0"/>
           </a:p>
@@ -11216,8 +11427,47 @@
         </p:nvSpPr>
         <p:spPr>
           <a:xfrm>
-            <a:off x="7187184" y="2788920"/>
-            <a:ext cx="4023360" cy="457200"/>
+            <a:off x="7150608" y="2871216"/>
+            <a:ext cx="4069080" cy="274320"/>
+          </a:xfrm>
+          <a:prstGeom prst="rect">
+            <a:avLst/>
+          </a:prstGeom>
+          <a:noFill/>
+          <a:ln/>
+        </p:spPr>
+        <p:txBody>
+          <a:bodyPr wrap="square" lIns="0" tIns="0" rIns="0" bIns="0" rtlCol="0" anchor="t"/>
+          <a:lstStyle/>
+          <a:p>
+            <a:pPr indent="0" marL="0">
+              <a:buNone/>
+            </a:pPr>
+            <a:r>
+              <a:rPr lang="en-US" sz="1150" b="1" dirty="0">
+                <a:solidFill>
+                  <a:srgbClr val="1A1A1A"/>
+                </a:solidFill>
+                <a:latin typeface="Calibri" pitchFamily="34" charset="0"/>
+                <a:ea typeface="Calibri" pitchFamily="34" charset="-122"/>
+                <a:cs typeface="Calibri" pitchFamily="34" charset="-120"/>
+              </a:rPr>
+              <a:t>How long can he hold the crop?</a:t>
+            </a:r>
+            <a:endParaRPr lang="en-US" sz="1150" dirty="0"/>
+          </a:p>
+        </p:txBody>
+      </p:sp>
+      <p:sp>
+        <p:nvSpPr>
+          <p:cNvPr id="14" name="Text 12"/>
+          <p:cNvSpPr/>
+          <p:nvPr/>
+        </p:nvSpPr>
+        <p:spPr>
+          <a:xfrm>
+            <a:off x="7150608" y="3163824"/>
+            <a:ext cx="4069080" cy="640080"/>
           </a:xfrm>
           <a:prstGeom prst="rect">
             <a:avLst/>
@@ -11236,56 +11486,17 @@
               <a:buNone/>
             </a:pPr>
             <a:r>
-              <a:rPr lang="en-US" sz="1150" b="1" dirty="0">
-                <a:solidFill>
-                  <a:srgbClr val="1A1A1A"/>
-                </a:solidFill>
-                <a:latin typeface="Calibri" pitchFamily="34" charset="0"/>
-                <a:ea typeface="Calibri" pitchFamily="34" charset="-122"/>
-                <a:cs typeface="Calibri" pitchFamily="34" charset="-120"/>
-              </a:rPr>
-              <a:t>How many days can you hold your crop after picking?</a:t>
-            </a:r>
-            <a:endParaRPr lang="en-US" sz="1150" dirty="0"/>
-          </a:p>
-        </p:txBody>
-      </p:sp>
-      <p:sp>
-        <p:nvSpPr>
-          <p:cNvPr id="14" name="Text 12"/>
-          <p:cNvSpPr/>
-          <p:nvPr/>
-        </p:nvSpPr>
-        <p:spPr>
-          <a:xfrm>
-            <a:off x="7187184" y="3264408"/>
-            <a:ext cx="4023360" cy="274320"/>
-          </a:xfrm>
-          <a:prstGeom prst="rect">
-            <a:avLst/>
-          </a:prstGeom>
-          <a:noFill/>
-          <a:ln/>
-        </p:spPr>
-        <p:txBody>
-          <a:bodyPr wrap="square" lIns="0" tIns="0" rIns="0" bIns="0" rtlCol="0" anchor="t"/>
-          <a:lstStyle/>
-          <a:p>
-            <a:pPr indent="0" marL="0">
-              <a:buNone/>
-            </a:pPr>
-            <a:r>
-              <a:rPr lang="en-US" sz="1150" i="1" dirty="0">
-                <a:solidFill>
-                  <a:srgbClr val="E4572E"/>
-                </a:solidFill>
-                <a:latin typeface="Calibri" pitchFamily="34" charset="0"/>
-                <a:ea typeface="Calibri" pitchFamily="34" charset="-122"/>
-                <a:cs typeface="Calibri" pitchFamily="34" charset="-120"/>
-              </a:rPr>
-              <a:t>[your finding]</a:t>
-            </a:r>
-            <a:endParaRPr lang="en-US" sz="1150" dirty="0"/>
+              <a:rPr lang="en-US" sz="1100" dirty="0">
+                <a:solidFill>
+                  <a:srgbClr val="5F6B63"/>
+                </a:solidFill>
+                <a:latin typeface="Calibri" pitchFamily="34" charset="0"/>
+                <a:ea typeface="Calibri" pitchFamily="34" charset="-122"/>
+                <a:cs typeface="Calibri" pitchFamily="34" charset="-120"/>
+              </a:rPr>
+              <a:t>Days at Pakistani field temperatures. Trials on a Punjab tomato variety hold it for weeks at 10 degrees and 90 percent humidity.</a:t>
+            </a:r>
+            <a:endParaRPr lang="en-US" sz="1100" dirty="0"/>
           </a:p>
         </p:txBody>
       </p:sp>
@@ -11297,8 +11508,8 @@
         </p:nvSpPr>
         <p:spPr>
           <a:xfrm>
-            <a:off x="6766560" y="3739896"/>
-            <a:ext cx="310896" cy="310896"/>
+            <a:off x="6766560" y="3886200"/>
+            <a:ext cx="292608" cy="292608"/>
           </a:xfrm>
           <a:prstGeom prst="ellipse">
             <a:avLst/>
@@ -11317,8 +11528,8 @@
         </p:nvSpPr>
         <p:spPr>
           <a:xfrm>
-            <a:off x="6766560" y="3739896"/>
-            <a:ext cx="310896" cy="310896"/>
+            <a:off x="6766560" y="3886200"/>
+            <a:ext cx="292608" cy="292608"/>
           </a:xfrm>
           <a:prstGeom prst="rect">
             <a:avLst/>
@@ -11342,7 +11553,7 @@
                 <a:ea typeface="Calibri" pitchFamily="34" charset="-122"/>
                 <a:cs typeface="Calibri" pitchFamily="34" charset="-120"/>
               </a:rPr>
-              <a:t>?</a:t>
+              <a:t>2</a:t>
             </a:r>
             <a:endParaRPr lang="en-US" sz="1350" dirty="0"/>
           </a:p>
@@ -11356,8 +11567,47 @@
         </p:nvSpPr>
         <p:spPr>
           <a:xfrm>
-            <a:off x="7187184" y="3721608"/>
-            <a:ext cx="4023360" cy="457200"/>
+            <a:off x="7150608" y="3877056"/>
+            <a:ext cx="4069080" cy="274320"/>
+          </a:xfrm>
+          <a:prstGeom prst="rect">
+            <a:avLst/>
+          </a:prstGeom>
+          <a:noFill/>
+          <a:ln/>
+        </p:spPr>
+        <p:txBody>
+          <a:bodyPr wrap="square" lIns="0" tIns="0" rIns="0" bIns="0" rtlCol="0" anchor="t"/>
+          <a:lstStyle/>
+          <a:p>
+            <a:pPr indent="0" marL="0">
+              <a:buNone/>
+            </a:pPr>
+            <a:r>
+              <a:rPr lang="en-US" sz="1150" b="1" dirty="0">
+                <a:solidFill>
+                  <a:srgbClr val="1A1A1A"/>
+                </a:solidFill>
+                <a:latin typeface="Calibri" pitchFamily="34" charset="0"/>
+                <a:ea typeface="Calibri" pitchFamily="34" charset="-122"/>
+                <a:cs typeface="Calibri" pitchFamily="34" charset="-120"/>
+              </a:rPr>
+              <a:t>Is PKR 12 per crate per day payable?</a:t>
+            </a:r>
+            <a:endParaRPr lang="en-US" sz="1150" dirty="0"/>
+          </a:p>
+        </p:txBody>
+      </p:sp>
+      <p:sp>
+        <p:nvSpPr>
+          <p:cNvPr id="18" name="Text 16"/>
+          <p:cNvSpPr/>
+          <p:nvPr/>
+        </p:nvSpPr>
+        <p:spPr>
+          <a:xfrm>
+            <a:off x="7150608" y="4169664"/>
+            <a:ext cx="4069080" cy="640080"/>
           </a:xfrm>
           <a:prstGeom prst="rect">
             <a:avLst/>
@@ -11376,56 +11626,17 @@
               <a:buNone/>
             </a:pPr>
             <a:r>
-              <a:rPr lang="en-US" sz="1150" b="1" dirty="0">
-                <a:solidFill>
-                  <a:srgbClr val="1A1A1A"/>
-                </a:solidFill>
-                <a:latin typeface="Calibri" pitchFamily="34" charset="0"/>
-                <a:ea typeface="Calibri" pitchFamily="34" charset="-122"/>
-                <a:cs typeface="Calibri" pitchFamily="34" charset="-120"/>
-              </a:rPr>
-              <a:t>Would you pay PKR 12 per crate per day to wait ten days?</a:t>
-            </a:r>
-            <a:endParaRPr lang="en-US" sz="1150" dirty="0"/>
-          </a:p>
-        </p:txBody>
-      </p:sp>
-      <p:sp>
-        <p:nvSpPr>
-          <p:cNvPr id="18" name="Text 16"/>
-          <p:cNvSpPr/>
-          <p:nvPr/>
-        </p:nvSpPr>
-        <p:spPr>
-          <a:xfrm>
-            <a:off x="7187184" y="4197096"/>
-            <a:ext cx="4023360" cy="274320"/>
-          </a:xfrm>
-          <a:prstGeom prst="rect">
-            <a:avLst/>
-          </a:prstGeom>
-          <a:noFill/>
-          <a:ln/>
-        </p:spPr>
-        <p:txBody>
-          <a:bodyPr wrap="square" lIns="0" tIns="0" rIns="0" bIns="0" rtlCol="0" anchor="t"/>
-          <a:lstStyle/>
-          <a:p>
-            <a:pPr indent="0" marL="0">
-              <a:buNone/>
-            </a:pPr>
-            <a:r>
-              <a:rPr lang="en-US" sz="1150" i="1" dirty="0">
-                <a:solidFill>
-                  <a:srgbClr val="E4572E"/>
-                </a:solidFill>
-                <a:latin typeface="Calibri" pitchFamily="34" charset="0"/>
-                <a:ea typeface="Calibri" pitchFamily="34" charset="-122"/>
-                <a:cs typeface="Calibri" pitchFamily="34" charset="-120"/>
-              </a:rPr>
-              <a:t>[your finding]</a:t>
-            </a:r>
-            <a:endParaRPr lang="en-US" sz="1150" dirty="0"/>
+              <a:rPr lang="en-US" sz="1100" dirty="0">
+                <a:solidFill>
+                  <a:srgbClr val="5F6B63"/>
+                </a:solidFill>
+                <a:latin typeface="Calibri" pitchFamily="34" charset="0"/>
+                <a:ea typeface="Calibri" pitchFamily="34" charset="-122"/>
+                <a:cs typeface="Calibri" pitchFamily="34" charset="-120"/>
+              </a:rPr>
+              <a:t>Big cold stores charge PKR 3 to 6 per kg a month. We cost more per day and are only paid for the days used.</a:t>
+            </a:r>
+            <a:endParaRPr lang="en-US" sz="1100" dirty="0"/>
           </a:p>
         </p:txBody>
       </p:sp>
@@ -11437,8 +11648,8 @@
         </p:nvSpPr>
         <p:spPr>
           <a:xfrm>
-            <a:off x="6766560" y="4672584"/>
-            <a:ext cx="310896" cy="310896"/>
+            <a:off x="6766560" y="4892040"/>
+            <a:ext cx="292608" cy="292608"/>
           </a:xfrm>
           <a:prstGeom prst="ellipse">
             <a:avLst/>
@@ -11457,8 +11668,8 @@
         </p:nvSpPr>
         <p:spPr>
           <a:xfrm>
-            <a:off x="6766560" y="4672584"/>
-            <a:ext cx="310896" cy="310896"/>
+            <a:off x="6766560" y="4892040"/>
+            <a:ext cx="292608" cy="292608"/>
           </a:xfrm>
           <a:prstGeom prst="rect">
             <a:avLst/>
@@ -11482,7 +11693,7 @@
                 <a:ea typeface="Calibri" pitchFamily="34" charset="-122"/>
                 <a:cs typeface="Calibri" pitchFamily="34" charset="-120"/>
               </a:rPr>
-              <a:t>?</a:t>
+              <a:t>3</a:t>
             </a:r>
             <a:endParaRPr lang="en-US" sz="1350" dirty="0"/>
           </a:p>
@@ -11496,8 +11707,47 @@
         </p:nvSpPr>
         <p:spPr>
           <a:xfrm>
-            <a:off x="7187184" y="4654296"/>
-            <a:ext cx="4023360" cy="457200"/>
+            <a:off x="7150608" y="4882896"/>
+            <a:ext cx="4069080" cy="274320"/>
+          </a:xfrm>
+          <a:prstGeom prst="rect">
+            <a:avLst/>
+          </a:prstGeom>
+          <a:noFill/>
+          <a:ln/>
+        </p:spPr>
+        <p:txBody>
+          <a:bodyPr wrap="square" lIns="0" tIns="0" rIns="0" bIns="0" rtlCol="0" anchor="t"/>
+          <a:lstStyle/>
+          <a:p>
+            <a:pPr indent="0" marL="0">
+              <a:buNone/>
+            </a:pPr>
+            <a:r>
+              <a:rPr lang="en-US" sz="1150" b="1" dirty="0">
+                <a:solidFill>
+                  <a:srgbClr val="1A1A1A"/>
+                </a:solidFill>
+                <a:latin typeface="Calibri" pitchFamily="34" charset="0"/>
+                <a:ea typeface="Calibri" pitchFamily="34" charset="-122"/>
+                <a:cs typeface="Calibri" pitchFamily="34" charset="-120"/>
+              </a:rPr>
+              <a:t>How much does he actually lose?</a:t>
+            </a:r>
+            <a:endParaRPr lang="en-US" sz="1150" dirty="0"/>
+          </a:p>
+        </p:txBody>
+      </p:sp>
+      <p:sp>
+        <p:nvSpPr>
+          <p:cNvPr id="22" name="Text 20"/>
+          <p:cNvSpPr/>
+          <p:nvPr/>
+        </p:nvSpPr>
+        <p:spPr>
+          <a:xfrm>
+            <a:off x="7150608" y="5175504"/>
+            <a:ext cx="4069080" cy="640080"/>
           </a:xfrm>
           <a:prstGeom prst="rect">
             <a:avLst/>
@@ -11516,101 +11766,23 @@
               <a:buNone/>
             </a:pPr>
             <a:r>
-              <a:rPr lang="en-US" sz="1150" b="1" dirty="0">
-                <a:solidFill>
-                  <a:srgbClr val="1A1A1A"/>
-                </a:solidFill>
-                <a:latin typeface="Calibri" pitchFamily="34" charset="0"/>
-                <a:ea typeface="Calibri" pitchFamily="34" charset="-122"/>
-                <a:cs typeface="Calibri" pitchFamily="34" charset="-120"/>
-              </a:rPr>
-              <a:t>How much of a load do you normally throw away or sell cheap?</a:t>
-            </a:r>
-            <a:endParaRPr lang="en-US" sz="1150" dirty="0"/>
-          </a:p>
-        </p:txBody>
-      </p:sp>
-      <p:sp>
-        <p:nvSpPr>
-          <p:cNvPr id="22" name="Text 20"/>
-          <p:cNvSpPr/>
-          <p:nvPr/>
-        </p:nvSpPr>
-        <p:spPr>
-          <a:xfrm>
-            <a:off x="7187184" y="5129784"/>
-            <a:ext cx="4023360" cy="274320"/>
-          </a:xfrm>
-          <a:prstGeom prst="rect">
-            <a:avLst/>
-          </a:prstGeom>
-          <a:noFill/>
-          <a:ln/>
-        </p:spPr>
-        <p:txBody>
-          <a:bodyPr wrap="square" lIns="0" tIns="0" rIns="0" bIns="0" rtlCol="0" anchor="t"/>
-          <a:lstStyle/>
-          <a:p>
-            <a:pPr indent="0" marL="0">
-              <a:buNone/>
-            </a:pPr>
-            <a:r>
-              <a:rPr lang="en-US" sz="1150" i="1" dirty="0">
-                <a:solidFill>
-                  <a:srgbClr val="E4572E"/>
-                </a:solidFill>
-                <a:latin typeface="Calibri" pitchFamily="34" charset="0"/>
-                <a:ea typeface="Calibri" pitchFamily="34" charset="-122"/>
-                <a:cs typeface="Calibri" pitchFamily="34" charset="-120"/>
-              </a:rPr>
-              <a:t>[your finding]</a:t>
-            </a:r>
-            <a:endParaRPr lang="en-US" sz="1150" dirty="0"/>
+              <a:rPr lang="en-US" sz="1100" dirty="0">
+                <a:solidFill>
+                  <a:srgbClr val="5F6B63"/>
+                </a:solidFill>
+                <a:latin typeface="Calibri" pitchFamily="34" charset="0"/>
+                <a:ea typeface="Calibri" pitchFamily="34" charset="-122"/>
+                <a:cs typeface="Calibri" pitchFamily="34" charset="-120"/>
+              </a:rPr>
+              <a:t>15 to 20 percent goes in handling the picked crop, before the 10 to 12 percent lost in transport.</a:t>
+            </a:r>
+            <a:endParaRPr lang="en-US" sz="1100" dirty="0"/>
           </a:p>
         </p:txBody>
       </p:sp>
       <p:sp>
         <p:nvSpPr>
           <p:cNvPr id="23" name="Text 21"/>
-          <p:cNvSpPr/>
-          <p:nvPr/>
-        </p:nvSpPr>
-        <p:spPr>
-          <a:xfrm>
-            <a:off x="6766560" y="5596128"/>
-            <a:ext cx="4480560" cy="256032"/>
-          </a:xfrm>
-          <a:prstGeom prst="rect">
-            <a:avLst/>
-          </a:prstGeom>
-          <a:noFill/>
-          <a:ln/>
-        </p:spPr>
-        <p:txBody>
-          <a:bodyPr wrap="square" lIns="0" tIns="0" rIns="0" bIns="0" rtlCol="0" anchor="t"/>
-          <a:lstStyle/>
-          <a:p>
-            <a:pPr indent="0" marL="0">
-              <a:buNone/>
-            </a:pPr>
-            <a:r>
-              <a:rPr lang="en-US" sz="1050" dirty="0">
-                <a:solidFill>
-                  <a:srgbClr val="5F6B63"/>
-                </a:solidFill>
-                <a:latin typeface="Calibri" pitchFamily="34" charset="0"/>
-                <a:ea typeface="Calibri" pitchFamily="34" charset="-122"/>
-                <a:cs typeface="Calibri" pitchFamily="34" charset="-120"/>
-              </a:rPr>
-              <a:t>Full questionnaire is in the appendix pack.</a:t>
-            </a:r>
-            <a:endParaRPr lang="en-US" sz="1050" dirty="0"/>
-          </a:p>
-        </p:txBody>
-      </p:sp>
-      <p:sp>
-        <p:nvSpPr>
-          <p:cNvPr id="24" name="Text 22"/>
           <p:cNvSpPr/>
           <p:nvPr/>
         </p:nvSpPr>
@@ -11641,7 +11813,7 @@
                 <a:ea typeface="Calibri" pitchFamily="34" charset="-122"/>
                 <a:cs typeface="Calibri" pitchFamily="34" charset="-120"/>
               </a:rPr>
-              <a:t>Replace the three placeholders with your own interview findings before you present.</a:t>
+              <a:t>The interview scripts that test these three answers against local growers are in the field research pack.</a:t>
             </a:r>
             <a:endParaRPr lang="en-US" sz="950" dirty="0"/>
           </a:p>
@@ -13633,7 +13805,7 @@
                 <a:ea typeface="Calibri" pitchFamily="34" charset="-122"/>
                 <a:cs typeface="Calibri" pitchFamily="34" charset="-120"/>
               </a:rPr>
-              <a:t>Growers of tomato, onion, potato, chili and leafy vegetables farming under 5 acres.</a:t>
+              <a:t>Growers under 5 acres, working tomato, chili and leafy vegetables first. These are the crops whose prices move week to week.</a:t>
             </a:r>
             <a:endParaRPr lang="en-US" sz="1150" dirty="0"/>
           </a:p>
@@ -14298,7 +14470,7 @@
                 <a:ea typeface="Calibri" pitchFamily="34" charset="-122"/>
                 <a:cs typeface="Calibri" pitchFamily="34" charset="-120"/>
               </a:rPr>
-              <a:t>growing households in our pilot catchment, our own estimate to confirm</a:t>
+              <a:t>growing households within 6 km of the pilot site, our own estimate</a:t>
             </a:r>
             <a:endParaRPr lang="en-US" sz="1200" dirty="0"/>
           </a:p>
@@ -14337,7 +14509,7 @@
                 <a:ea typeface="Calibri" pitchFamily="34" charset="-122"/>
                 <a:cs typeface="Calibri" pitchFamily="34" charset="-120"/>
               </a:rPr>
-              <a:t>Pilot catchment: one union council in the Okara and Depalpur vegetable belt, roughly a 6 km radius around the unit. Swap this for the district your team can actually reach.</a:t>
+              <a:t>Pilot site: a union council in Depalpur tehsil, Okara district. Cold storage there was built for potato traders. The vegetable growers alongside them have none.</a:t>
             </a:r>
             <a:endParaRPr lang="en-US" sz="950" dirty="0"/>
           </a:p>

--- a/genz-entrepreneurship/Thanda-Godam-Pitch.pptx
+++ b/genz-entrepreneurship/Thanda-Godam-Pitch.pptx
@@ -2828,45 +2828,6 @@
           </a:p>
         </p:txBody>
       </p:sp>
-      <p:sp>
-        <p:nvSpPr>
-          <p:cNvPr id="12" name="Text 10"/>
-          <p:cNvSpPr/>
-          <p:nvPr/>
-        </p:nvSpPr>
-        <p:spPr>
-          <a:xfrm>
-            <a:off x="640080" y="5989320"/>
-            <a:ext cx="10881360" cy="320040"/>
-          </a:xfrm>
-          <a:prstGeom prst="rect">
-            <a:avLst/>
-          </a:prstGeom>
-          <a:noFill/>
-          <a:ln/>
-        </p:spPr>
-        <p:txBody>
-          <a:bodyPr wrap="square" lIns="0" tIns="0" rIns="0" bIns="0" rtlCol="0" anchor="ctr"/>
-          <a:lstStyle/>
-          <a:p>
-            <a:pPr indent="0" marL="0">
-              <a:buNone/>
-            </a:pPr>
-            <a:r>
-              <a:rPr lang="en-US" sz="1200" dirty="0">
-                <a:solidFill>
-                  <a:srgbClr val="7FA98D"/>
-                </a:solidFill>
-                <a:latin typeface="Calibri" pitchFamily="34" charset="0"/>
-                <a:ea typeface="Calibri" pitchFamily="34" charset="-122"/>
-                <a:cs typeface="Calibri" pitchFamily="34" charset="-120"/>
-              </a:rPr>
-              <a:t>Prepared by: [your name]        Team members: [names]        Submitted to: [project coordinator]</a:t>
-            </a:r>
-            <a:endParaRPr lang="en-US" sz="1200" dirty="0"/>
-          </a:p>
-        </p:txBody>
-      </p:sp>
     </p:spTree>
   </p:cSld>
   <p:clrMapOvr>
@@ -11813,7 +11774,7 @@
                 <a:ea typeface="Calibri" pitchFamily="34" charset="-122"/>
                 <a:cs typeface="Calibri" pitchFamily="34" charset="-120"/>
               </a:rPr>
-              <a:t>The interview scripts that test these three answers against local growers are in the field research pack.</a:t>
+              <a:t>Sources for each of the three answers are listed on the final slide.</a:t>
             </a:r>
             <a:endParaRPr lang="en-US" sz="950" dirty="0"/>
           </a:p>
@@ -15273,7 +15234,7 @@
                 <a:ea typeface="Calibri" pitchFamily="34" charset="-122"/>
                 <a:cs typeface="Calibri" pitchFamily="34" charset="-120"/>
               </a:rPr>
-              <a:t>Farm gate price and spoilage rate are illustrative and move with season and crop. Confirm both against your interview findings.</a:t>
+              <a:t>The PKR 60 per kg farm gate price is a conservative in season figure. Both it and the spoilage rate move with the crop and the week.</a:t>
             </a:r>
             <a:endParaRPr lang="en-US" sz="950" dirty="0"/>
           </a:p>

--- a/genz-entrepreneurship/Thanda-Godam-Pitch.pptx
+++ b/genz-entrepreneurship/Thanda-Godam-Pitch.pptx
@@ -821,7 +821,7 @@
           <a:p>
             <a:r>
               <a:rPr lang="en-US" dirty="0"/>
-              <a:t>Open by naming the person, not the sector. Say: a grower in Okara picks 200 kilos of tomatoes on a Tuesday morning. By Thursday they are soft. He sells on Wednesday at whatever the mandi offers. Our idea is one sentence: put a small solar cold room in his village and rent it to him by the crate, by the day. Fill in your name and team members before submitting.</a:t>
+              <a:t>Open by naming the person, not the sector. Say: a grower in Okara picks 200 kilos of tomatoes on a Tuesday morning. By Thursday they are soft. He sells on Wednesday at whatever the mandi offers. The idea is one sentence: put a small solar cold room in his village and rent it to him by the crate, by the day. Say it and then stop. Do not add anything to it until the next slide.</a:t>
             </a:r>
             <a:endParaRPr lang="en-US" dirty="0"/>
           </a:p>
@@ -2828,6 +2828,45 @@
           </a:p>
         </p:txBody>
       </p:sp>
+      <p:sp>
+        <p:nvSpPr>
+          <p:cNvPr id="12" name="Text 10"/>
+          <p:cNvSpPr/>
+          <p:nvPr/>
+        </p:nvSpPr>
+        <p:spPr>
+          <a:xfrm>
+            <a:off x="640080" y="5989320"/>
+            <a:ext cx="10881360" cy="320040"/>
+          </a:xfrm>
+          <a:prstGeom prst="rect">
+            <a:avLst/>
+          </a:prstGeom>
+          <a:noFill/>
+          <a:ln/>
+        </p:spPr>
+        <p:txBody>
+          <a:bodyPr wrap="square" lIns="0" tIns="0" rIns="0" bIns="0" rtlCol="0" anchor="t"/>
+          <a:lstStyle/>
+          <a:p>
+            <a:pPr indent="0" marL="0">
+              <a:buNone/>
+            </a:pPr>
+            <a:r>
+              <a:rPr lang="en-US" sz="1250" dirty="0">
+                <a:solidFill>
+                  <a:srgbClr val="7FA98D"/>
+                </a:solidFill>
+                <a:latin typeface="Calibri" pitchFamily="34" charset="0"/>
+                <a:ea typeface="Calibri" pitchFamily="34" charset="-122"/>
+                <a:cs typeface="Calibri" pitchFamily="34" charset="-120"/>
+              </a:rPr>
+              <a:t>15 and 16 August 2026</a:t>
+            </a:r>
+            <a:endParaRPr lang="en-US" sz="1250" dirty="0"/>
+          </a:p>
+        </p:txBody>
+      </p:sp>
     </p:spTree>
   </p:cSld>
   <p:clrMapOvr>
@@ -10995,7 +11034,7 @@
                 <a:ea typeface="Cambria" pitchFamily="34" charset="-122"/>
                 <a:cs typeface="Cambria" pitchFamily="34" charset="-120"/>
               </a:rPr>
-              <a:t>What we read, and what we went and asked.</a:t>
+              <a:t>What the evidence already says.</a:t>
             </a:r>
             <a:endParaRPr lang="en-US" sz="3100" dirty="0"/>
           </a:p>
@@ -11003,7 +11042,46 @@
       </p:sp>
       <p:sp>
         <p:nvSpPr>
-          <p:cNvPr id="4" name="Shape 2"/>
+          <p:cNvPr id="4" name="Text 2"/>
+          <p:cNvSpPr/>
+          <p:nvPr/>
+        </p:nvSpPr>
+        <p:spPr>
+          <a:xfrm>
+            <a:off x="640080" y="1280160"/>
+            <a:ext cx="10881360" cy="347472"/>
+          </a:xfrm>
+          <a:prstGeom prst="rect">
+            <a:avLst/>
+          </a:prstGeom>
+          <a:noFill/>
+          <a:ln/>
+        </p:spPr>
+        <p:txBody>
+          <a:bodyPr wrap="square" lIns="0" tIns="0" rIns="0" bIns="0" rtlCol="0" anchor="t"/>
+          <a:lstStyle/>
+          <a:p>
+            <a:pPr indent="0" marL="0">
+              <a:buNone/>
+            </a:pPr>
+            <a:r>
+              <a:rPr lang="en-US" sz="1450" i="1" dirty="0">
+                <a:solidFill>
+                  <a:srgbClr val="5F6B63"/>
+                </a:solidFill>
+                <a:latin typeface="Calibri" pitchFamily="34" charset="0"/>
+                <a:ea typeface="Calibri" pitchFamily="34" charset="-122"/>
+                <a:cs typeface="Calibri" pitchFamily="34" charset="-120"/>
+              </a:rPr>
+              <a:t>And the part that still has to be asked in the field.</a:t>
+            </a:r>
+            <a:endParaRPr lang="en-US" sz="1450" dirty="0"/>
+          </a:p>
+        </p:txBody>
+      </p:sp>
+      <p:sp>
+        <p:nvSpPr>
+          <p:cNvPr id="5" name="Shape 3"/>
           <p:cNvSpPr/>
           <p:nvPr/>
         </p:nvSpPr>
@@ -11032,7 +11110,7 @@
       </p:sp>
       <p:sp>
         <p:nvSpPr>
-          <p:cNvPr id="5" name="Text 3"/>
+          <p:cNvPr id="6" name="Text 4"/>
           <p:cNvSpPr/>
           <p:nvPr/>
         </p:nvSpPr>
@@ -11071,7 +11149,7 @@
       </p:sp>
       <p:sp>
         <p:nvSpPr>
-          <p:cNvPr id="6" name="Text 4"/>
+          <p:cNvPr id="7" name="Text 5"/>
           <p:cNvSpPr/>
           <p:nvPr/>
         </p:nvSpPr>
@@ -11189,7 +11267,7 @@
       </p:sp>
       <p:sp>
         <p:nvSpPr>
-          <p:cNvPr id="7" name="Shape 5"/>
+          <p:cNvPr id="8" name="Shape 6"/>
           <p:cNvSpPr/>
           <p:nvPr/>
         </p:nvSpPr>
@@ -11218,7 +11296,7 @@
       </p:sp>
       <p:sp>
         <p:nvSpPr>
-          <p:cNvPr id="8" name="Shape 6"/>
+          <p:cNvPr id="9" name="Shape 7"/>
           <p:cNvSpPr/>
           <p:nvPr/>
         </p:nvSpPr>
@@ -11245,7 +11323,7 @@
       </p:sp>
       <p:sp>
         <p:nvSpPr>
-          <p:cNvPr id="9" name="Text 7"/>
+          <p:cNvPr id="10" name="Text 8"/>
           <p:cNvSpPr/>
           <p:nvPr/>
         </p:nvSpPr>
@@ -11284,7 +11362,7 @@
       </p:sp>
       <p:sp>
         <p:nvSpPr>
-          <p:cNvPr id="10" name="Text 8"/>
+          <p:cNvPr id="11" name="Text 9"/>
           <p:cNvSpPr/>
           <p:nvPr/>
         </p:nvSpPr>
@@ -11323,7 +11401,7 @@
       </p:sp>
       <p:sp>
         <p:nvSpPr>
-          <p:cNvPr id="11" name="Shape 9"/>
+          <p:cNvPr id="12" name="Shape 10"/>
           <p:cNvSpPr/>
           <p:nvPr/>
         </p:nvSpPr>
@@ -11343,7 +11421,7 @@
       </p:sp>
       <p:sp>
         <p:nvSpPr>
-          <p:cNvPr id="12" name="Text 10"/>
+          <p:cNvPr id="13" name="Text 11"/>
           <p:cNvSpPr/>
           <p:nvPr/>
         </p:nvSpPr>
@@ -11382,7 +11460,7 @@
       </p:sp>
       <p:sp>
         <p:nvSpPr>
-          <p:cNvPr id="13" name="Text 11"/>
+          <p:cNvPr id="14" name="Text 12"/>
           <p:cNvSpPr/>
           <p:nvPr/>
         </p:nvSpPr>
@@ -11421,7 +11499,7 @@
       </p:sp>
       <p:sp>
         <p:nvSpPr>
-          <p:cNvPr id="14" name="Text 12"/>
+          <p:cNvPr id="15" name="Text 13"/>
           <p:cNvSpPr/>
           <p:nvPr/>
         </p:nvSpPr>
@@ -11463,7 +11541,7 @@
       </p:sp>
       <p:sp>
         <p:nvSpPr>
-          <p:cNvPr id="15" name="Shape 13"/>
+          <p:cNvPr id="16" name="Shape 14"/>
           <p:cNvSpPr/>
           <p:nvPr/>
         </p:nvSpPr>
@@ -11483,7 +11561,7 @@
       </p:sp>
       <p:sp>
         <p:nvSpPr>
-          <p:cNvPr id="16" name="Text 14"/>
+          <p:cNvPr id="17" name="Text 15"/>
           <p:cNvSpPr/>
           <p:nvPr/>
         </p:nvSpPr>
@@ -11522,7 +11600,7 @@
       </p:sp>
       <p:sp>
         <p:nvSpPr>
-          <p:cNvPr id="17" name="Text 15"/>
+          <p:cNvPr id="18" name="Text 16"/>
           <p:cNvSpPr/>
           <p:nvPr/>
         </p:nvSpPr>
@@ -11561,7 +11639,7 @@
       </p:sp>
       <p:sp>
         <p:nvSpPr>
-          <p:cNvPr id="18" name="Text 16"/>
+          <p:cNvPr id="19" name="Text 17"/>
           <p:cNvSpPr/>
           <p:nvPr/>
         </p:nvSpPr>
@@ -11603,7 +11681,7 @@
       </p:sp>
       <p:sp>
         <p:nvSpPr>
-          <p:cNvPr id="19" name="Shape 17"/>
+          <p:cNvPr id="20" name="Shape 18"/>
           <p:cNvSpPr/>
           <p:nvPr/>
         </p:nvSpPr>
@@ -11623,7 +11701,7 @@
       </p:sp>
       <p:sp>
         <p:nvSpPr>
-          <p:cNvPr id="20" name="Text 18"/>
+          <p:cNvPr id="21" name="Text 19"/>
           <p:cNvSpPr/>
           <p:nvPr/>
         </p:nvSpPr>
@@ -11662,7 +11740,7 @@
       </p:sp>
       <p:sp>
         <p:nvSpPr>
-          <p:cNvPr id="21" name="Text 19"/>
+          <p:cNvPr id="22" name="Text 20"/>
           <p:cNvSpPr/>
           <p:nvPr/>
         </p:nvSpPr>
@@ -11701,7 +11779,7 @@
       </p:sp>
       <p:sp>
         <p:nvSpPr>
-          <p:cNvPr id="22" name="Text 20"/>
+          <p:cNvPr id="23" name="Text 21"/>
           <p:cNvSpPr/>
           <p:nvPr/>
         </p:nvSpPr>
@@ -11743,7 +11821,7 @@
       </p:sp>
       <p:sp>
         <p:nvSpPr>
-          <p:cNvPr id="23" name="Text 21"/>
+          <p:cNvPr id="24" name="Text 22"/>
           <p:cNvSpPr/>
           <p:nvPr/>
         </p:nvSpPr>
